--- a/slides/11_packages_lists_and_objects.pptx
+++ b/slides/11_packages_lists_and_objects.pptx
@@ -68,6 +68,11 @@
     <p:sldId id="316" r:id="rId62"/>
     <p:sldId id="317" r:id="rId63"/>
     <p:sldId id="318" r:id="rId64"/>
+    <p:sldId id="319" r:id="rId65"/>
+    <p:sldId id="320" r:id="rId66"/>
+    <p:sldId id="321" r:id="rId67"/>
+    <p:sldId id="322" r:id="rId68"/>
+    <p:sldId id="323" r:id="rId69"/>
   </p:sldIdLst>
   <p:sldSz cx="12192000" cy="6858000"/>
   <p:notesSz cx="6858000" cy="9144000"/>
@@ -6345,8 +6350,6 @@
               <a:rPr/>
               <a:t>R 기초 프로그래밍</a:t>
             </a:r>
-            <a:br/>
-            <a:br/>
           </a:p>
         </p:txBody>
       </p:sp>
@@ -8117,6 +8120,21 @@
             <a:r>
               <a:rPr/>
               <a:t>로 객체 구조를 조사할 수 있다.</a:t>
+            </a:r>
+          </a:p>
+          <a:p>
+            <a:pPr lvl="0" indent="-457200" marL="457200">
+              <a:buAutoNum type="arabicPeriod"/>
+            </a:pPr>
+            <a:r>
+              <a:rPr>
+                <a:latin typeface="Courier"/>
+              </a:rPr>
+              <a:t>ggplot2</a:t>
+            </a:r>
+            <a:r>
+              <a:rPr/>
+              <a:t>와 Seurat의 시각화 결과가 R 객체임을 설명할 수 있다.</a:t>
             </a:r>
           </a:p>
           <a:p>
@@ -13545,8 +13563,14 @@
               <a:buNone/>
             </a:pPr>
             <a:r>
-              <a:rPr/>
-              <a:t>복잡한 분석 객체는 구조를 먼저 확인한다</a:t>
+              <a:rPr>
+                <a:latin typeface="Courier"/>
+              </a:rPr>
+              <a:t>ggplot2</a:t>
+            </a:r>
+            <a:r>
+              <a:rPr/>
+              <a:t> 그래프도 조사할 수 있는 R 객체다</a:t>
             </a:r>
           </a:p>
         </p:txBody>
@@ -13577,12 +13601,191 @@
             </a:pPr>
             <a:r>
               <a:rPr>
-                <a:latin typeface="Courier"/>
-              </a:rPr>
-              <a:t>1. class(object)
-2. str(object, max.level = 2)
-3. names(object)
-4. 필요한 하위 원소의 class()와 names()</a:t>
+                <a:solidFill>
+                  <a:srgbClr val="4758AB"/>
+                </a:solidFill>
+                <a:latin typeface="Courier"/>
+              </a:rPr>
+              <a:t>library</a:t>
+            </a:r>
+            <a:r>
+              <a:rPr>
+                <a:solidFill>
+                  <a:srgbClr val="003B4F"/>
+                </a:solidFill>
+                <a:latin typeface="Courier"/>
+              </a:rPr>
+              <a:t>(ggplot2)</a:t>
+            </a:r>
+            <a:br/>
+            <a:br/>
+            <a:r>
+              <a:rPr>
+                <a:solidFill>
+                  <a:srgbClr val="003B4F"/>
+                </a:solidFill>
+                <a:latin typeface="Courier"/>
+              </a:rPr>
+              <a:t>qc_plot &lt;- </a:t>
+            </a:r>
+            <a:r>
+              <a:rPr>
+                <a:solidFill>
+                  <a:srgbClr val="4758AB"/>
+                </a:solidFill>
+                <a:latin typeface="Courier"/>
+              </a:rPr>
+              <a:t>ggplot</a:t>
+            </a:r>
+            <a:r>
+              <a:rPr>
+                <a:solidFill>
+                  <a:srgbClr val="003B4F"/>
+                </a:solidFill>
+                <a:latin typeface="Courier"/>
+              </a:rPr>
+              <a:t>(</a:t>
+            </a:r>
+            <a:br/>
+            <a:r>
+              <a:rPr>
+                <a:solidFill>
+                  <a:srgbClr val="003B4F"/>
+                </a:solidFill>
+                <a:latin typeface="Courier"/>
+              </a:rPr>
+              <a:t>  sample_metadata,</a:t>
+            </a:r>
+            <a:br/>
+            <a:r>
+              <a:rPr>
+                <a:solidFill>
+                  <a:srgbClr val="003B4F"/>
+                </a:solidFill>
+                <a:latin typeface="Courier"/>
+              </a:rPr>
+              <a:t>  </a:t>
+            </a:r>
+            <a:r>
+              <a:rPr>
+                <a:solidFill>
+                  <a:srgbClr val="4758AB"/>
+                </a:solidFill>
+                <a:latin typeface="Courier"/>
+              </a:rPr>
+              <a:t>aes</a:t>
+            </a:r>
+            <a:r>
+              <a:rPr>
+                <a:solidFill>
+                  <a:srgbClr val="003B4F"/>
+                </a:solidFill>
+                <a:latin typeface="Courier"/>
+              </a:rPr>
+              <a:t>(</a:t>
+            </a:r>
+            <a:r>
+              <a:rPr>
+                <a:solidFill>
+                  <a:srgbClr val="657422"/>
+                </a:solidFill>
+                <a:latin typeface="Courier"/>
+              </a:rPr>
+              <a:t>x =</a:t>
+            </a:r>
+            <a:r>
+              <a:rPr>
+                <a:solidFill>
+                  <a:srgbClr val="003B4F"/>
+                </a:solidFill>
+                <a:latin typeface="Courier"/>
+              </a:rPr>
+              <a:t> condition, </a:t>
+            </a:r>
+            <a:r>
+              <a:rPr>
+                <a:solidFill>
+                  <a:srgbClr val="657422"/>
+                </a:solidFill>
+                <a:latin typeface="Courier"/>
+              </a:rPr>
+              <a:t>y =</a:t>
+            </a:r>
+            <a:r>
+              <a:rPr>
+                <a:solidFill>
+                  <a:srgbClr val="003B4F"/>
+                </a:solidFill>
+                <a:latin typeface="Courier"/>
+              </a:rPr>
+              <a:t> cell_count)</a:t>
+            </a:r>
+            <a:br/>
+            <a:r>
+              <a:rPr>
+                <a:solidFill>
+                  <a:srgbClr val="003B4F"/>
+                </a:solidFill>
+                <a:latin typeface="Courier"/>
+              </a:rPr>
+              <a:t>) </a:t>
+            </a:r>
+            <a:r>
+              <a:rPr>
+                <a:solidFill>
+                  <a:srgbClr val="5E5E5E"/>
+                </a:solidFill>
+                <a:latin typeface="Courier"/>
+              </a:rPr>
+              <a:t>+</a:t>
+            </a:r>
+            <a:br/>
+            <a:r>
+              <a:rPr>
+                <a:solidFill>
+                  <a:srgbClr val="003B4F"/>
+                </a:solidFill>
+                <a:latin typeface="Courier"/>
+              </a:rPr>
+              <a:t>  </a:t>
+            </a:r>
+            <a:r>
+              <a:rPr>
+                <a:solidFill>
+                  <a:srgbClr val="4758AB"/>
+                </a:solidFill>
+                <a:latin typeface="Courier"/>
+              </a:rPr>
+              <a:t>geom_boxplot</a:t>
+            </a:r>
+            <a:r>
+              <a:rPr>
+                <a:solidFill>
+                  <a:srgbClr val="003B4F"/>
+                </a:solidFill>
+                <a:latin typeface="Courier"/>
+              </a:rPr>
+              <a:t>()</a:t>
+            </a:r>
+            <a:br/>
+            <a:br/>
+            <a:r>
+              <a:rPr>
+                <a:solidFill>
+                  <a:srgbClr val="4758AB"/>
+                </a:solidFill>
+                <a:latin typeface="Courier"/>
+              </a:rPr>
+              <a:t>class</a:t>
+            </a:r>
+            <a:r>
+              <a:rPr>
+                <a:solidFill>
+                  <a:srgbClr val="003B4F"/>
+                </a:solidFill>
+                <a:latin typeface="Courier"/>
+              </a:rPr>
+              <a:t>(qc_plot)</a:t>
             </a:r>
           </a:p>
           <a:p>
@@ -13591,7 +13794,7 @@
             </a:pPr>
             <a:r>
               <a:rPr/>
-              <a:t>처음부터 깊은 위치를 추측하지 않고 바깥 구조부터 단계적으로 살펴봅니다.</a:t>
+              <a:t>그래프를 화면에 그리는 명령의 결과를 이름에 저장하면 다시 사용하고 수정할 수 있습니다.</a:t>
             </a:r>
           </a:p>
         </p:txBody>
@@ -13644,7 +13847,7 @@
             </a:pPr>
             <a:r>
               <a:rPr/>
-              <a:t>Seurat 객체도 여러 정보를 담는 복합 객체다</a:t>
+              <a:t>기존 그래프 객체에 층을 더할 수 있다</a:t>
             </a:r>
           </a:p>
         </p:txBody>
@@ -13670,49 +13873,249 @@
           <a:bodyPr/>
           <a:lstStyle/>
           <a:p>
+            <a:pPr lvl="0" indent="0">
+              <a:buNone/>
+            </a:pPr>
+            <a:r>
+              <a:rPr>
+                <a:solidFill>
+                  <a:srgbClr val="003B4F"/>
+                </a:solidFill>
+                <a:latin typeface="Courier"/>
+              </a:rPr>
+              <a:t>labeled_plot &lt;- qc_plot </a:t>
+            </a:r>
+            <a:r>
+              <a:rPr>
+                <a:solidFill>
+                  <a:srgbClr val="5E5E5E"/>
+                </a:solidFill>
+                <a:latin typeface="Courier"/>
+              </a:rPr>
+              <a:t>+</a:t>
+            </a:r>
+            <a:br/>
+            <a:r>
+              <a:rPr>
+                <a:solidFill>
+                  <a:srgbClr val="003B4F"/>
+                </a:solidFill>
+                <a:latin typeface="Courier"/>
+              </a:rPr>
+              <a:t>  </a:t>
+            </a:r>
+            <a:r>
+              <a:rPr>
+                <a:solidFill>
+                  <a:srgbClr val="4758AB"/>
+                </a:solidFill>
+                <a:latin typeface="Courier"/>
+              </a:rPr>
+              <a:t>labs</a:t>
+            </a:r>
+            <a:r>
+              <a:rPr>
+                <a:solidFill>
+                  <a:srgbClr val="003B4F"/>
+                </a:solidFill>
+                <a:latin typeface="Courier"/>
+              </a:rPr>
+              <a:t>(</a:t>
+            </a:r>
+            <a:br/>
+            <a:r>
+              <a:rPr>
+                <a:solidFill>
+                  <a:srgbClr val="003B4F"/>
+                </a:solidFill>
+                <a:latin typeface="Courier"/>
+              </a:rPr>
+              <a:t>    </a:t>
+            </a:r>
+            <a:r>
+              <a:rPr>
+                <a:solidFill>
+                  <a:srgbClr val="657422"/>
+                </a:solidFill>
+                <a:latin typeface="Courier"/>
+              </a:rPr>
+              <a:t>title =</a:t>
+            </a:r>
+            <a:r>
+              <a:rPr>
+                <a:solidFill>
+                  <a:srgbClr val="003B4F"/>
+                </a:solidFill>
+                <a:latin typeface="Courier"/>
+              </a:rPr>
+              <a:t> </a:t>
+            </a:r>
+            <a:r>
+              <a:rPr>
+                <a:solidFill>
+                  <a:srgbClr val="20794D"/>
+                </a:solidFill>
+                <a:latin typeface="Courier"/>
+              </a:rPr>
+              <a:t>"실험 조건별 세포 수"</a:t>
+            </a:r>
+            <a:r>
+              <a:rPr>
+                <a:solidFill>
+                  <a:srgbClr val="003B4F"/>
+                </a:solidFill>
+                <a:latin typeface="Courier"/>
+              </a:rPr>
+              <a:t>,</a:t>
+            </a:r>
+            <a:br/>
+            <a:r>
+              <a:rPr>
+                <a:solidFill>
+                  <a:srgbClr val="003B4F"/>
+                </a:solidFill>
+                <a:latin typeface="Courier"/>
+              </a:rPr>
+              <a:t>    </a:t>
+            </a:r>
+            <a:r>
+              <a:rPr>
+                <a:solidFill>
+                  <a:srgbClr val="657422"/>
+                </a:solidFill>
+                <a:latin typeface="Courier"/>
+              </a:rPr>
+              <a:t>x =</a:t>
+            </a:r>
+            <a:r>
+              <a:rPr>
+                <a:solidFill>
+                  <a:srgbClr val="003B4F"/>
+                </a:solidFill>
+                <a:latin typeface="Courier"/>
+              </a:rPr>
+              <a:t> </a:t>
+            </a:r>
+            <a:r>
+              <a:rPr>
+                <a:solidFill>
+                  <a:srgbClr val="20794D"/>
+                </a:solidFill>
+                <a:latin typeface="Courier"/>
+              </a:rPr>
+              <a:t>"실험 조건"</a:t>
+            </a:r>
+            <a:r>
+              <a:rPr>
+                <a:solidFill>
+                  <a:srgbClr val="003B4F"/>
+                </a:solidFill>
+                <a:latin typeface="Courier"/>
+              </a:rPr>
+              <a:t>,</a:t>
+            </a:r>
+            <a:br/>
+            <a:r>
+              <a:rPr>
+                <a:solidFill>
+                  <a:srgbClr val="003B4F"/>
+                </a:solidFill>
+                <a:latin typeface="Courier"/>
+              </a:rPr>
+              <a:t>    </a:t>
+            </a:r>
+            <a:r>
+              <a:rPr>
+                <a:solidFill>
+                  <a:srgbClr val="657422"/>
+                </a:solidFill>
+                <a:latin typeface="Courier"/>
+              </a:rPr>
+              <a:t>y =</a:t>
+            </a:r>
+            <a:r>
+              <a:rPr>
+                <a:solidFill>
+                  <a:srgbClr val="003B4F"/>
+                </a:solidFill>
+                <a:latin typeface="Courier"/>
+              </a:rPr>
+              <a:t> </a:t>
+            </a:r>
+            <a:r>
+              <a:rPr>
+                <a:solidFill>
+                  <a:srgbClr val="20794D"/>
+                </a:solidFill>
+                <a:latin typeface="Courier"/>
+              </a:rPr>
+              <a:t>"세포 수"</a:t>
+            </a:r>
+            <a:br/>
+            <a:r>
+              <a:rPr>
+                <a:solidFill>
+                  <a:srgbClr val="003B4F"/>
+                </a:solidFill>
+                <a:latin typeface="Courier"/>
+              </a:rPr>
+              <a:t>  ) </a:t>
+            </a:r>
+            <a:r>
+              <a:rPr>
+                <a:solidFill>
+                  <a:srgbClr val="5E5E5E"/>
+                </a:solidFill>
+                <a:latin typeface="Courier"/>
+              </a:rPr>
+              <a:t>+</a:t>
+            </a:r>
+            <a:br/>
+            <a:r>
+              <a:rPr>
+                <a:solidFill>
+                  <a:srgbClr val="003B4F"/>
+                </a:solidFill>
+                <a:latin typeface="Courier"/>
+              </a:rPr>
+              <a:t>  </a:t>
+            </a:r>
+            <a:r>
+              <a:rPr>
+                <a:solidFill>
+                  <a:srgbClr val="4758AB"/>
+                </a:solidFill>
+                <a:latin typeface="Courier"/>
+              </a:rPr>
+              <a:t>theme_minimal</a:t>
+            </a:r>
+            <a:r>
+              <a:rPr>
+                <a:solidFill>
+                  <a:srgbClr val="003B4F"/>
+                </a:solidFill>
+                <a:latin typeface="Courier"/>
+              </a:rPr>
+              <a:t>()</a:t>
+            </a:r>
+          </a:p>
+          <a:p>
             <a:pPr lvl="0" indent="0" marL="0">
               <a:buNone/>
             </a:pPr>
             <a:r>
               <a:rPr/>
-              <a:t>Seurat 객체에는 일반적으로 다음과 같은 종류의 정보가 함께 들어 있습니다.</a:t>
-            </a:r>
-          </a:p>
-          <a:p>
-            <a:pPr lvl="0"/>
-            <a:r>
-              <a:rPr/>
-              <a:t>발현 데이터</a:t>
-            </a:r>
-          </a:p>
-          <a:p>
-            <a:pPr lvl="0"/>
-            <a:r>
-              <a:rPr/>
-              <a:t>세포 메타데이터</a:t>
-            </a:r>
-          </a:p>
-          <a:p>
-            <a:pPr lvl="0"/>
-            <a:r>
-              <a:rPr/>
-              <a:t>차원 축소 결과</a:t>
-            </a:r>
-          </a:p>
-          <a:p>
-            <a:pPr lvl="0"/>
-            <a:r>
-              <a:rPr/>
-              <a:t>분석 과정에서 생성된 결과와 설정</a:t>
-            </a:r>
-          </a:p>
-          <a:p>
-            <a:pPr lvl="0" indent="0" marL="0">
-              <a:buNone/>
-            </a:pPr>
-            <a:r>
-              <a:rPr/>
-              <a:t>실제 접근 방법은 Seurat 버전과 객체 클래스의 공식 사용법을 확인합니다.</a:t>
+              <a:t>원본 </a:t>
+            </a:r>
+            <a:r>
+              <a:rPr>
+                <a:latin typeface="Courier"/>
+              </a:rPr>
+              <a:t>qc_plot</a:t>
+            </a:r>
+            <a:r>
+              <a:rPr/>
+              <a:t>은 유지되고, 설명이 추가된 새 객체가 만들어집니다.</a:t>
             </a:r>
           </a:p>
         </p:txBody>
@@ -13764,8 +14167,14 @@
               <a:buNone/>
             </a:pPr>
             <a:r>
-              <a:rPr/>
-              <a:t>복잡한 객체는 제공된 접근 함수를 우선 사용한다</a:t>
+              <a:rPr>
+                <a:latin typeface="Courier"/>
+              </a:rPr>
+              <a:t>patchwork</a:t>
+            </a:r>
+            <a:r>
+              <a:rPr/>
+              <a:t> 결과도 하나의 복합 객체다</a:t>
             </a:r>
           </a:p>
         </p:txBody>
@@ -13791,51 +14200,233 @@
           <a:bodyPr/>
           <a:lstStyle/>
           <a:p>
-            <a:pPr lvl="0"/>
-            <a:r>
-              <a:rPr/>
-              <a:t>객체 내부 구조는 패키지 버전에 따라 달라질 수 있습니다.</a:t>
-            </a:r>
-          </a:p>
-          <a:p>
-            <a:pPr lvl="0"/>
-            <a:r>
-              <a:rPr/>
-              <a:t>내부 위치를 직접 수정하면 객체의 일관성이 깨질 수 있습니다.</a:t>
-            </a:r>
-          </a:p>
-          <a:p>
-            <a:pPr lvl="0"/>
-            <a:r>
-              <a:rPr/>
-              <a:t>패키지가 제공하는 함수와 공식 도움말을 우선 사용합니다.</a:t>
-            </a:r>
-          </a:p>
-          <a:p>
-            <a:pPr lvl="0"/>
-            <a:r>
-              <a:rPr/>
-              <a:t>문제가 생기면 </a:t>
-            </a:r>
-            <a:r>
-              <a:rPr>
-                <a:latin typeface="Courier"/>
-              </a:rPr>
-              <a:t>class()</a:t>
-            </a:r>
-            <a:r>
-              <a:rPr/>
-              <a:t>, </a:t>
-            </a:r>
-            <a:r>
-              <a:rPr>
-                <a:latin typeface="Courier"/>
-              </a:rPr>
-              <a:t>str()</a:t>
-            </a:r>
-            <a:r>
-              <a:rPr/>
-              <a:t>, 패키지 버전을 함께 확인합니다.</a:t>
+            <a:pPr lvl="0" indent="0">
+              <a:buNone/>
+            </a:pPr>
+            <a:r>
+              <a:rPr>
+                <a:solidFill>
+                  <a:srgbClr val="4758AB"/>
+                </a:solidFill>
+                <a:latin typeface="Courier"/>
+              </a:rPr>
+              <a:t>library</a:t>
+            </a:r>
+            <a:r>
+              <a:rPr>
+                <a:solidFill>
+                  <a:srgbClr val="003B4F"/>
+                </a:solidFill>
+                <a:latin typeface="Courier"/>
+              </a:rPr>
+              <a:t>(patchwork)</a:t>
+            </a:r>
+            <a:br/>
+            <a:br/>
+            <a:r>
+              <a:rPr>
+                <a:solidFill>
+                  <a:srgbClr val="003B4F"/>
+                </a:solidFill>
+                <a:latin typeface="Courier"/>
+              </a:rPr>
+              <a:t>relationship_plot &lt;- </a:t>
+            </a:r>
+            <a:r>
+              <a:rPr>
+                <a:solidFill>
+                  <a:srgbClr val="4758AB"/>
+                </a:solidFill>
+                <a:latin typeface="Courier"/>
+              </a:rPr>
+              <a:t>ggplot</a:t>
+            </a:r>
+            <a:r>
+              <a:rPr>
+                <a:solidFill>
+                  <a:srgbClr val="003B4F"/>
+                </a:solidFill>
+                <a:latin typeface="Courier"/>
+              </a:rPr>
+              <a:t>(</a:t>
+            </a:r>
+            <a:br/>
+            <a:r>
+              <a:rPr>
+                <a:solidFill>
+                  <a:srgbClr val="003B4F"/>
+                </a:solidFill>
+                <a:latin typeface="Courier"/>
+              </a:rPr>
+              <a:t>  sample_metadata,</a:t>
+            </a:r>
+            <a:br/>
+            <a:r>
+              <a:rPr>
+                <a:solidFill>
+                  <a:srgbClr val="003B4F"/>
+                </a:solidFill>
+                <a:latin typeface="Courier"/>
+              </a:rPr>
+              <a:t>  </a:t>
+            </a:r>
+            <a:r>
+              <a:rPr>
+                <a:solidFill>
+                  <a:srgbClr val="4758AB"/>
+                </a:solidFill>
+                <a:latin typeface="Courier"/>
+              </a:rPr>
+              <a:t>aes</a:t>
+            </a:r>
+            <a:r>
+              <a:rPr>
+                <a:solidFill>
+                  <a:srgbClr val="003B4F"/>
+                </a:solidFill>
+                <a:latin typeface="Courier"/>
+              </a:rPr>
+              <a:t>(</a:t>
+            </a:r>
+            <a:r>
+              <a:rPr>
+                <a:solidFill>
+                  <a:srgbClr val="657422"/>
+                </a:solidFill>
+                <a:latin typeface="Courier"/>
+              </a:rPr>
+              <a:t>x =</a:t>
+            </a:r>
+            <a:r>
+              <a:rPr>
+                <a:solidFill>
+                  <a:srgbClr val="003B4F"/>
+                </a:solidFill>
+                <a:latin typeface="Courier"/>
+              </a:rPr>
+              <a:t> cell_count, </a:t>
+            </a:r>
+            <a:r>
+              <a:rPr>
+                <a:solidFill>
+                  <a:srgbClr val="657422"/>
+                </a:solidFill>
+                <a:latin typeface="Courier"/>
+              </a:rPr>
+              <a:t>y =</a:t>
+            </a:r>
+            <a:r>
+              <a:rPr>
+                <a:solidFill>
+                  <a:srgbClr val="003B4F"/>
+                </a:solidFill>
+                <a:latin typeface="Courier"/>
+              </a:rPr>
+              <a:t> median_genes)</a:t>
+            </a:r>
+            <a:br/>
+            <a:r>
+              <a:rPr>
+                <a:solidFill>
+                  <a:srgbClr val="003B4F"/>
+                </a:solidFill>
+                <a:latin typeface="Courier"/>
+              </a:rPr>
+              <a:t>) </a:t>
+            </a:r>
+            <a:r>
+              <a:rPr>
+                <a:solidFill>
+                  <a:srgbClr val="5E5E5E"/>
+                </a:solidFill>
+                <a:latin typeface="Courier"/>
+              </a:rPr>
+              <a:t>+</a:t>
+            </a:r>
+            <a:br/>
+            <a:r>
+              <a:rPr>
+                <a:solidFill>
+                  <a:srgbClr val="003B4F"/>
+                </a:solidFill>
+                <a:latin typeface="Courier"/>
+              </a:rPr>
+              <a:t>  </a:t>
+            </a:r>
+            <a:r>
+              <a:rPr>
+                <a:solidFill>
+                  <a:srgbClr val="4758AB"/>
+                </a:solidFill>
+                <a:latin typeface="Courier"/>
+              </a:rPr>
+              <a:t>geom_point</a:t>
+            </a:r>
+            <a:r>
+              <a:rPr>
+                <a:solidFill>
+                  <a:srgbClr val="003B4F"/>
+                </a:solidFill>
+                <a:latin typeface="Courier"/>
+              </a:rPr>
+              <a:t>()</a:t>
+            </a:r>
+            <a:br/>
+            <a:br/>
+            <a:r>
+              <a:rPr>
+                <a:solidFill>
+                  <a:srgbClr val="003B4F"/>
+                </a:solidFill>
+                <a:latin typeface="Courier"/>
+              </a:rPr>
+              <a:t>combined_plot &lt;- labeled_plot </a:t>
+            </a:r>
+            <a:r>
+              <a:rPr>
+                <a:solidFill>
+                  <a:srgbClr val="5E5E5E"/>
+                </a:solidFill>
+                <a:latin typeface="Courier"/>
+              </a:rPr>
+              <a:t>|</a:t>
+            </a:r>
+            <a:r>
+              <a:rPr>
+                <a:solidFill>
+                  <a:srgbClr val="003B4F"/>
+                </a:solidFill>
+                <a:latin typeface="Courier"/>
+              </a:rPr>
+              <a:t> relationship_plot</a:t>
+            </a:r>
+            <a:br/>
+            <a:r>
+              <a:rPr>
+                <a:solidFill>
+                  <a:srgbClr val="4758AB"/>
+                </a:solidFill>
+                <a:latin typeface="Courier"/>
+              </a:rPr>
+              <a:t>class</a:t>
+            </a:r>
+            <a:r>
+              <a:rPr>
+                <a:solidFill>
+                  <a:srgbClr val="003B4F"/>
+                </a:solidFill>
+                <a:latin typeface="Courier"/>
+              </a:rPr>
+              <a:t>(combined_plot)</a:t>
+            </a:r>
+          </a:p>
+          <a:p>
+            <a:pPr lvl="0" indent="0" marL="0">
+              <a:buNone/>
+            </a:pPr>
+            <a:r>
+              <a:rPr/>
+              <a:t>완성된 그래프를 객체로 다루기 때문에 조합과 저장을 단계적으로 수행할 수 있습니다.</a:t>
             </a:r>
           </a:p>
         </p:txBody>
@@ -13888,7 +14479,7 @@
             </a:pPr>
             <a:r>
               <a:rPr/>
-              <a:t>CSV는 복합 객체 전체를 저장할 수 없다</a:t>
+              <a:t>Seurat 시각화 함수도 그래프 객체를 반환한다</a:t>
             </a:r>
           </a:p>
         </p:txBody>
@@ -13914,24 +14505,210 @@
           <a:bodyPr/>
           <a:lstStyle/>
           <a:p>
-            <a:pPr lvl="0"/>
-            <a:r>
-              <a:rPr/>
-              <a:t>CSV는 하나의 직사각형 표를 저장하기에 적합합니다.</a:t>
-            </a:r>
-          </a:p>
-          <a:p>
-            <a:pPr lvl="0"/>
-            <a:r>
-              <a:rPr/>
-              <a:t>리스트 안의 행렬, 데이터 프레임, 설정값을 한 CSV에 그대로 저장할 수 없습니다.</a:t>
-            </a:r>
-          </a:p>
-          <a:p>
-            <a:pPr lvl="0"/>
-            <a:r>
-              <a:rPr/>
-              <a:t>R 객체 구조 전체를 보존하려면 RDS 형식을 사용할 수 있습니다.</a:t>
+            <a:pPr lvl="0" indent="0">
+              <a:buNone/>
+            </a:pPr>
+            <a:r>
+              <a:rPr>
+                <a:solidFill>
+                  <a:srgbClr val="5E5E5E"/>
+                </a:solidFill>
+                <a:latin typeface="Courier"/>
+              </a:rPr>
+              <a:t># 부록의 Seurat 실습에서 실행</a:t>
+            </a:r>
+            <a:br/>
+            <a:r>
+              <a:rPr>
+                <a:solidFill>
+                  <a:srgbClr val="003B4F"/>
+                </a:solidFill>
+                <a:latin typeface="Courier"/>
+              </a:rPr>
+              <a:t>umap_plot &lt;- </a:t>
+            </a:r>
+            <a:r>
+              <a:rPr>
+                <a:solidFill>
+                  <a:srgbClr val="4758AB"/>
+                </a:solidFill>
+                <a:latin typeface="Courier"/>
+              </a:rPr>
+              <a:t>DimPlot</a:t>
+            </a:r>
+            <a:r>
+              <a:rPr>
+                <a:solidFill>
+                  <a:srgbClr val="003B4F"/>
+                </a:solidFill>
+                <a:latin typeface="Courier"/>
+              </a:rPr>
+              <a:t>(pbmc, </a:t>
+            </a:r>
+            <a:r>
+              <a:rPr>
+                <a:solidFill>
+                  <a:srgbClr val="657422"/>
+                </a:solidFill>
+                <a:latin typeface="Courier"/>
+              </a:rPr>
+              <a:t>reduction =</a:t>
+            </a:r>
+            <a:r>
+              <a:rPr>
+                <a:solidFill>
+                  <a:srgbClr val="003B4F"/>
+                </a:solidFill>
+                <a:latin typeface="Courier"/>
+              </a:rPr>
+              <a:t> </a:t>
+            </a:r>
+            <a:r>
+              <a:rPr>
+                <a:solidFill>
+                  <a:srgbClr val="20794D"/>
+                </a:solidFill>
+                <a:latin typeface="Courier"/>
+              </a:rPr>
+              <a:t>"umap"</a:t>
+            </a:r>
+            <a:r>
+              <a:rPr>
+                <a:solidFill>
+                  <a:srgbClr val="003B4F"/>
+                </a:solidFill>
+                <a:latin typeface="Courier"/>
+              </a:rPr>
+              <a:t>)</a:t>
+            </a:r>
+            <a:br/>
+            <a:br/>
+            <a:r>
+              <a:rPr>
+                <a:solidFill>
+                  <a:srgbClr val="4758AB"/>
+                </a:solidFill>
+                <a:latin typeface="Courier"/>
+              </a:rPr>
+              <a:t>class</a:t>
+            </a:r>
+            <a:r>
+              <a:rPr>
+                <a:solidFill>
+                  <a:srgbClr val="003B4F"/>
+                </a:solidFill>
+                <a:latin typeface="Courier"/>
+              </a:rPr>
+              <a:t>(umap_plot)</a:t>
+            </a:r>
+            <a:br/>
+            <a:r>
+              <a:rPr>
+                <a:solidFill>
+                  <a:srgbClr val="003B4F"/>
+                </a:solidFill>
+                <a:latin typeface="Courier"/>
+              </a:rPr>
+              <a:t>umap_plot </a:t>
+            </a:r>
+            <a:r>
+              <a:rPr>
+                <a:solidFill>
+                  <a:srgbClr val="5E5E5E"/>
+                </a:solidFill>
+                <a:latin typeface="Courier"/>
+              </a:rPr>
+              <a:t>+</a:t>
+            </a:r>
+            <a:r>
+              <a:rPr>
+                <a:solidFill>
+                  <a:srgbClr val="003B4F"/>
+                </a:solidFill>
+                <a:latin typeface="Courier"/>
+              </a:rPr>
+              <a:t> </a:t>
+            </a:r>
+            <a:r>
+              <a:rPr>
+                <a:solidFill>
+                  <a:srgbClr val="4758AB"/>
+                </a:solidFill>
+                <a:latin typeface="Courier"/>
+              </a:rPr>
+              <a:t>ggtitle</a:t>
+            </a:r>
+            <a:r>
+              <a:rPr>
+                <a:solidFill>
+                  <a:srgbClr val="003B4F"/>
+                </a:solidFill>
+                <a:latin typeface="Courier"/>
+              </a:rPr>
+              <a:t>(</a:t>
+            </a:r>
+            <a:r>
+              <a:rPr>
+                <a:solidFill>
+                  <a:srgbClr val="20794D"/>
+                </a:solidFill>
+                <a:latin typeface="Courier"/>
+              </a:rPr>
+              <a:t>"PBMC 세포 군집"</a:t>
+            </a:r>
+            <a:r>
+              <a:rPr>
+                <a:solidFill>
+                  <a:srgbClr val="003B4F"/>
+                </a:solidFill>
+                <a:latin typeface="Courier"/>
+              </a:rPr>
+              <a:t>)</a:t>
+            </a:r>
+          </a:p>
+          <a:p>
+            <a:pPr lvl="0" indent="0" marL="0">
+              <a:buNone/>
+            </a:pPr>
+            <a:r>
+              <a:rPr>
+                <a:latin typeface="Courier"/>
+              </a:rPr>
+              <a:t>DimPlot()</a:t>
+            </a:r>
+            <a:r>
+              <a:rPr/>
+              <a:t>, </a:t>
+            </a:r>
+            <a:r>
+              <a:rPr>
+                <a:latin typeface="Courier"/>
+              </a:rPr>
+              <a:t>FeaturePlot()</a:t>
+            </a:r>
+            <a:r>
+              <a:rPr/>
+              <a:t>, </a:t>
+            </a:r>
+            <a:r>
+              <a:rPr>
+                <a:latin typeface="Courier"/>
+              </a:rPr>
+              <a:t>VlnPlot()</a:t>
+            </a:r>
+            <a:r>
+              <a:rPr/>
+              <a:t>의 결과도 이름에 저장해 제목을 더하거나 </a:t>
+            </a:r>
+            <a:r>
+              <a:rPr>
+                <a:latin typeface="Courier"/>
+              </a:rPr>
+              <a:t>patchwork</a:t>
+            </a:r>
+            <a:r>
+              <a:rPr/>
+              <a:t>로 조합할 수 있습니다.</a:t>
             </a:r>
           </a:p>
         </p:txBody>
@@ -14079,14 +14856,18 @@
               <a:buNone/>
             </a:pPr>
             <a:r>
-              <a:rPr>
-                <a:latin typeface="Courier"/>
-              </a:rPr>
-              <a:t>saveRDS()</a:t>
-            </a:r>
-            <a:r>
-              <a:rPr/>
-              <a:t>로 객체 하나를 저장한다</a:t>
+              <a:rPr/>
+              <a:t>그래프 객체는 </a:t>
+            </a:r>
+            <a:r>
+              <a:rPr>
+                <a:latin typeface="Courier"/>
+              </a:rPr>
+              <a:t>ggsave()</a:t>
+            </a:r>
+            <a:r>
+              <a:rPr/>
+              <a:t>로 명시해 저장한다</a:t>
             </a:r>
           </a:p>
         </p:txBody>
@@ -14122,7 +14903,7 @@
                 </a:solidFill>
                 <a:latin typeface="Courier"/>
               </a:rPr>
-              <a:t>dir.create</a:t>
+              <a:t>ggsave</a:t>
             </a:r>
             <a:r>
               <a:rPr>
@@ -14133,6 +14914,34 @@
               </a:rPr>
               <a:t>(</a:t>
             </a:r>
+            <a:br/>
+            <a:r>
+              <a:rPr>
+                <a:solidFill>
+                  <a:srgbClr val="003B4F"/>
+                </a:solidFill>
+                <a:latin typeface="Courier"/>
+              </a:rPr>
+              <a:t>  </a:t>
+            </a:r>
+            <a:r>
+              <a:rPr>
+                <a:solidFill>
+                  <a:srgbClr val="657422"/>
+                </a:solidFill>
+                <a:latin typeface="Courier"/>
+              </a:rPr>
+              <a:t>filename =</a:t>
+            </a:r>
+            <a:r>
+              <a:rPr>
+                <a:solidFill>
+                  <a:srgbClr val="003B4F"/>
+                </a:solidFill>
+                <a:latin typeface="Courier"/>
+              </a:rPr>
+              <a:t> </a:t>
+            </a:r>
             <a:r>
               <a:rPr>
                 <a:solidFill>
@@ -14140,16 +14949,26 @@
                 </a:solidFill>
                 <a:latin typeface="Courier"/>
               </a:rPr>
-              <a:t>"results"</a:t>
-            </a:r>
-            <a:r>
-              <a:rPr>
-                <a:solidFill>
-                  <a:srgbClr val="003B4F"/>
-                </a:solidFill>
-                <a:latin typeface="Courier"/>
-              </a:rPr>
-              <a:t>, </a:t>
+              <a:t>"results/qc_plot.png"</a:t>
+            </a:r>
+            <a:r>
+              <a:rPr>
+                <a:solidFill>
+                  <a:srgbClr val="003B4F"/>
+                </a:solidFill>
+                <a:latin typeface="Courier"/>
+              </a:rPr>
+              <a:t>,</a:t>
+            </a:r>
+            <a:br/>
+            <a:r>
+              <a:rPr>
+                <a:solidFill>
+                  <a:srgbClr val="003B4F"/>
+                </a:solidFill>
+                <a:latin typeface="Courier"/>
+              </a:rPr>
+              <a:t>  </a:t>
             </a:r>
             <a:r>
               <a:rPr>
@@ -14158,7 +14977,35 @@
                 </a:solidFill>
                 <a:latin typeface="Courier"/>
               </a:rPr>
-              <a:t>showWarnings =</a:t>
+              <a:t>plot =</a:t>
+            </a:r>
+            <a:r>
+              <a:rPr>
+                <a:solidFill>
+                  <a:srgbClr val="003B4F"/>
+                </a:solidFill>
+                <a:latin typeface="Courier"/>
+              </a:rPr>
+              <a:t> labeled_plot,</a:t>
+            </a:r>
+            <a:br/>
+            <a:r>
+              <a:rPr>
+                <a:solidFill>
+                  <a:srgbClr val="003B4F"/>
+                </a:solidFill>
+                <a:latin typeface="Courier"/>
+              </a:rPr>
+              <a:t>  </a:t>
+            </a:r>
+            <a:r>
+              <a:rPr>
+                <a:solidFill>
+                  <a:srgbClr val="657422"/>
+                </a:solidFill>
+                <a:latin typeface="Courier"/>
+              </a:rPr>
+              <a:t>width =</a:t>
             </a:r>
             <a:r>
               <a:rPr>
@@ -14172,12 +15019,105 @@
             <a:r>
               <a:rPr>
                 <a:solidFill>
-                  <a:srgbClr val="8F5902"/>
-                </a:solidFill>
-                <a:latin typeface="Courier"/>
-              </a:rPr>
-              <a:t>FALSE</a:t>
-            </a:r>
+                  <a:srgbClr val="AD0000"/>
+                </a:solidFill>
+                <a:latin typeface="Courier"/>
+              </a:rPr>
+              <a:t>7</a:t>
+            </a:r>
+            <a:r>
+              <a:rPr>
+                <a:solidFill>
+                  <a:srgbClr val="003B4F"/>
+                </a:solidFill>
+                <a:latin typeface="Courier"/>
+              </a:rPr>
+              <a:t>,</a:t>
+            </a:r>
+            <a:br/>
+            <a:r>
+              <a:rPr>
+                <a:solidFill>
+                  <a:srgbClr val="003B4F"/>
+                </a:solidFill>
+                <a:latin typeface="Courier"/>
+              </a:rPr>
+              <a:t>  </a:t>
+            </a:r>
+            <a:r>
+              <a:rPr>
+                <a:solidFill>
+                  <a:srgbClr val="657422"/>
+                </a:solidFill>
+                <a:latin typeface="Courier"/>
+              </a:rPr>
+              <a:t>height =</a:t>
+            </a:r>
+            <a:r>
+              <a:rPr>
+                <a:solidFill>
+                  <a:srgbClr val="003B4F"/>
+                </a:solidFill>
+                <a:latin typeface="Courier"/>
+              </a:rPr>
+              <a:t> </a:t>
+            </a:r>
+            <a:r>
+              <a:rPr>
+                <a:solidFill>
+                  <a:srgbClr val="AD0000"/>
+                </a:solidFill>
+                <a:latin typeface="Courier"/>
+              </a:rPr>
+              <a:t>5</a:t>
+            </a:r>
+            <a:r>
+              <a:rPr>
+                <a:solidFill>
+                  <a:srgbClr val="003B4F"/>
+                </a:solidFill>
+                <a:latin typeface="Courier"/>
+              </a:rPr>
+              <a:t>,</a:t>
+            </a:r>
+            <a:br/>
+            <a:r>
+              <a:rPr>
+                <a:solidFill>
+                  <a:srgbClr val="003B4F"/>
+                </a:solidFill>
+                <a:latin typeface="Courier"/>
+              </a:rPr>
+              <a:t>  </a:t>
+            </a:r>
+            <a:r>
+              <a:rPr>
+                <a:solidFill>
+                  <a:srgbClr val="657422"/>
+                </a:solidFill>
+                <a:latin typeface="Courier"/>
+              </a:rPr>
+              <a:t>dpi =</a:t>
+            </a:r>
+            <a:r>
+              <a:rPr>
+                <a:solidFill>
+                  <a:srgbClr val="003B4F"/>
+                </a:solidFill>
+                <a:latin typeface="Courier"/>
+              </a:rPr>
+              <a:t> </a:t>
+            </a:r>
+            <a:r>
+              <a:rPr>
+                <a:solidFill>
+                  <a:srgbClr val="AD0000"/>
+                </a:solidFill>
+                <a:latin typeface="Courier"/>
+              </a:rPr>
+              <a:t>150</a:t>
+            </a:r>
+            <a:br/>
             <a:r>
               <a:rPr>
                 <a:solidFill>
@@ -14187,73 +15127,20 @@
               </a:rPr>
               <a:t>)</a:t>
             </a:r>
-            <a:br/>
-            <a:br/>
-            <a:r>
-              <a:rPr>
-                <a:solidFill>
-                  <a:srgbClr val="4758AB"/>
-                </a:solidFill>
-                <a:latin typeface="Courier"/>
-              </a:rPr>
-              <a:t>saveRDS</a:t>
-            </a:r>
-            <a:r>
-              <a:rPr>
-                <a:solidFill>
-                  <a:srgbClr val="003B4F"/>
-                </a:solidFill>
-                <a:latin typeface="Courier"/>
-              </a:rPr>
-              <a:t>(</a:t>
-            </a:r>
-            <a:br/>
-            <a:r>
-              <a:rPr>
-                <a:solidFill>
-                  <a:srgbClr val="003B4F"/>
-                </a:solidFill>
-                <a:latin typeface="Courier"/>
-              </a:rPr>
-              <a:t>  analysis_result,</a:t>
-            </a:r>
-            <a:br/>
-            <a:r>
-              <a:rPr>
-                <a:solidFill>
-                  <a:srgbClr val="003B4F"/>
-                </a:solidFill>
-                <a:latin typeface="Courier"/>
-              </a:rPr>
-              <a:t>  </a:t>
-            </a:r>
-            <a:r>
-              <a:rPr>
-                <a:solidFill>
-                  <a:srgbClr val="20794D"/>
-                </a:solidFill>
-                <a:latin typeface="Courier"/>
-              </a:rPr>
-              <a:t>"results/analysis_result.rds"</a:t>
-            </a:r>
-            <a:br/>
-            <a:r>
-              <a:rPr>
-                <a:solidFill>
-                  <a:srgbClr val="003B4F"/>
-                </a:solidFill>
-                <a:latin typeface="Courier"/>
-              </a:rPr>
-              <a:t>)</a:t>
-            </a:r>
           </a:p>
           <a:p>
             <a:pPr lvl="0" indent="0" marL="0">
               <a:buNone/>
             </a:pPr>
             <a:r>
-              <a:rPr/>
-              <a:t>RDS 파일은 객체의 자료형과 중첩 구조를 함께 보존합니다.</a:t>
+              <a:rPr>
+                <a:latin typeface="Courier"/>
+              </a:rPr>
+              <a:t>plot</a:t>
+            </a:r>
+            <a:r>
+              <a:rPr/>
+              <a:t> 인자에 저장할 객체를 명시하면 마지막으로 표시된 그래프에 의존하지 않습니다.</a:t>
             </a:r>
           </a:p>
         </p:txBody>
@@ -14305,14 +15192,8 @@
               <a:buNone/>
             </a:pPr>
             <a:r>
-              <a:rPr>
-                <a:latin typeface="Courier"/>
-              </a:rPr>
-              <a:t>readRDS()</a:t>
-            </a:r>
-            <a:r>
-              <a:rPr/>
-              <a:t>로 객체를 다시 불러온다</a:t>
+              <a:rPr/>
+              <a:t>복잡한 분석 객체는 구조를 먼저 확인한다</a:t>
             </a:r>
           </a:p>
         </p:txBody>
@@ -14343,142 +15224,12 @@
             </a:pPr>
             <a:r>
               <a:rPr>
-                <a:solidFill>
-                  <a:srgbClr val="003B4F"/>
-                </a:solidFill>
-                <a:latin typeface="Courier"/>
-              </a:rPr>
-              <a:t>restored_result &lt;- </a:t>
-            </a:r>
-            <a:r>
-              <a:rPr>
-                <a:solidFill>
-                  <a:srgbClr val="4758AB"/>
-                </a:solidFill>
-                <a:latin typeface="Courier"/>
-              </a:rPr>
-              <a:t>readRDS</a:t>
-            </a:r>
-            <a:r>
-              <a:rPr>
-                <a:solidFill>
-                  <a:srgbClr val="003B4F"/>
-                </a:solidFill>
-                <a:latin typeface="Courier"/>
-              </a:rPr>
-              <a:t>(</a:t>
-            </a:r>
-            <a:r>
-              <a:rPr>
-                <a:solidFill>
-                  <a:srgbClr val="20794D"/>
-                </a:solidFill>
-                <a:latin typeface="Courier"/>
-              </a:rPr>
-              <a:t>"results/analysis_result.rds"</a:t>
-            </a:r>
-            <a:r>
-              <a:rPr>
-                <a:solidFill>
-                  <a:srgbClr val="003B4F"/>
-                </a:solidFill>
-                <a:latin typeface="Courier"/>
-              </a:rPr>
-              <a:t>)</a:t>
-            </a:r>
-            <a:br/>
-            <a:br/>
-            <a:r>
-              <a:rPr>
-                <a:solidFill>
-                  <a:srgbClr val="4758AB"/>
-                </a:solidFill>
-                <a:latin typeface="Courier"/>
-              </a:rPr>
-              <a:t>class</a:t>
-            </a:r>
-            <a:r>
-              <a:rPr>
-                <a:solidFill>
-                  <a:srgbClr val="003B4F"/>
-                </a:solidFill>
-                <a:latin typeface="Courier"/>
-              </a:rPr>
-              <a:t>(restored_result)</a:t>
-            </a:r>
-            <a:br/>
-            <a:r>
-              <a:rPr>
-                <a:solidFill>
-                  <a:srgbClr val="4758AB"/>
-                </a:solidFill>
-                <a:latin typeface="Courier"/>
-              </a:rPr>
-              <a:t>names</a:t>
-            </a:r>
-            <a:r>
-              <a:rPr>
-                <a:solidFill>
-                  <a:srgbClr val="003B4F"/>
-                </a:solidFill>
-                <a:latin typeface="Courier"/>
-              </a:rPr>
-              <a:t>(restored_result)</a:t>
-            </a:r>
-            <a:br/>
-            <a:r>
-              <a:rPr>
-                <a:solidFill>
-                  <a:srgbClr val="4758AB"/>
-                </a:solidFill>
-                <a:latin typeface="Courier"/>
-              </a:rPr>
-              <a:t>str</a:t>
-            </a:r>
-            <a:r>
-              <a:rPr>
-                <a:solidFill>
-                  <a:srgbClr val="003B4F"/>
-                </a:solidFill>
-                <a:latin typeface="Courier"/>
-              </a:rPr>
-              <a:t>(restored_result, </a:t>
-            </a:r>
-            <a:r>
-              <a:rPr>
-                <a:solidFill>
-                  <a:srgbClr val="657422"/>
-                </a:solidFill>
-                <a:latin typeface="Courier"/>
-              </a:rPr>
-              <a:t>max.level =</a:t>
-            </a:r>
-            <a:r>
-              <a:rPr>
-                <a:solidFill>
-                  <a:srgbClr val="003B4F"/>
-                </a:solidFill>
-                <a:latin typeface="Courier"/>
-              </a:rPr>
-              <a:t> </a:t>
-            </a:r>
-            <a:r>
-              <a:rPr>
-                <a:solidFill>
-                  <a:srgbClr val="AD0000"/>
-                </a:solidFill>
-                <a:latin typeface="Courier"/>
-              </a:rPr>
-              <a:t>2</a:t>
-            </a:r>
-            <a:r>
-              <a:rPr>
-                <a:solidFill>
-                  <a:srgbClr val="003B4F"/>
-                </a:solidFill>
-                <a:latin typeface="Courier"/>
-              </a:rPr>
-              <a:t>)</a:t>
+                <a:latin typeface="Courier"/>
+              </a:rPr>
+              <a:t>1. class(object)
+2. str(object, max.level = 2)
+3. names(object)
+4. 필요한 하위 원소의 class()와 names()</a:t>
             </a:r>
           </a:p>
           <a:p>
@@ -14486,14 +15237,8 @@
               <a:buNone/>
             </a:pPr>
             <a:r>
-              <a:rPr>
-                <a:latin typeface="Courier"/>
-              </a:rPr>
-              <a:t>readRDS()</a:t>
-            </a:r>
-            <a:r>
-              <a:rPr/>
-              <a:t>의 결과를 원하는 변수 이름에 저장합니다.</a:t>
+              <a:rPr/>
+              <a:t>처음부터 깊은 위치를 추측하지 않고 바깥 구조부터 단계적으로 살펴봅니다.</a:t>
             </a:r>
           </a:p>
         </p:txBody>
@@ -14546,7 +15291,7 @@
             </a:pPr>
             <a:r>
               <a:rPr/>
-              <a:t>저장 전후 객체가 같은지 확인한다</a:t>
+              <a:t>Seurat 객체도 여러 정보를 담는 복합 객체다</a:t>
             </a:r>
           </a:p>
         </p:txBody>
@@ -14572,26 +15317,40 @@
           <a:bodyPr/>
           <a:lstStyle/>
           <a:p>
-            <a:pPr lvl="0" indent="0">
+            <a:pPr lvl="0" indent="0" marL="0">
               <a:buNone/>
             </a:pPr>
             <a:r>
-              <a:rPr>
-                <a:solidFill>
-                  <a:srgbClr val="4758AB"/>
-                </a:solidFill>
-                <a:latin typeface="Courier"/>
-              </a:rPr>
-              <a:t>identical</a:t>
-            </a:r>
-            <a:r>
-              <a:rPr>
-                <a:solidFill>
-                  <a:srgbClr val="003B4F"/>
-                </a:solidFill>
-                <a:latin typeface="Courier"/>
-              </a:rPr>
-              <a:t>(analysis_result, restored_result)</a:t>
+              <a:rPr/>
+              <a:t>Seurat 객체에는 일반적으로 다음과 같은 종류의 정보가 함께 들어 있습니다.</a:t>
+            </a:r>
+          </a:p>
+          <a:p>
+            <a:pPr lvl="0"/>
+            <a:r>
+              <a:rPr/>
+              <a:t>발현 데이터</a:t>
+            </a:r>
+          </a:p>
+          <a:p>
+            <a:pPr lvl="0"/>
+            <a:r>
+              <a:rPr/>
+              <a:t>세포 메타데이터</a:t>
+            </a:r>
+          </a:p>
+          <a:p>
+            <a:pPr lvl="0"/>
+            <a:r>
+              <a:rPr/>
+              <a:t>차원 축소 결과</a:t>
+            </a:r>
+          </a:p>
+          <a:p>
+            <a:pPr lvl="0"/>
+            <a:r>
+              <a:rPr/>
+              <a:t>분석 과정에서 생성된 결과와 설정</a:t>
             </a:r>
           </a:p>
           <a:p>
@@ -14599,14 +15358,8 @@
               <a:buNone/>
             </a:pPr>
             <a:r>
-              <a:rPr>
-                <a:latin typeface="Courier"/>
-              </a:rPr>
-              <a:t>TRUE</a:t>
-            </a:r>
-            <a:r>
-              <a:rPr/>
-              <a:t>이면 자료형과 값, 구조가 모두 같습니다.</a:t>
+              <a:rPr/>
+              <a:t>실제 접근 방법은 Seurat 버전과 객체 클래스의 공식 사용법을 확인합니다.</a:t>
             </a:r>
           </a:p>
         </p:txBody>
@@ -14617,6 +15370,804 @@
 </file>
 
 <file path=ppt/slides/slide53.xml><?xml version="1.0" encoding="utf-8"?>
+<p:sld xmlns:a="http://schemas.openxmlformats.org/drawingml/2006/main" xmlns:r="http://schemas.openxmlformats.org/officeDocument/2006/relationships" xmlns:p="http://schemas.openxmlformats.org/presentationml/2006/main">
+  <p:cSld>
+    <p:spTree>
+      <p:nvGrpSpPr>
+        <p:cNvPr id="1" name=""/>
+        <p:cNvGrpSpPr/>
+        <p:nvPr/>
+      </p:nvGrpSpPr>
+      <p:grpSpPr>
+        <a:xfrm>
+          <a:off x="0" y="0"/>
+          <a:ext cx="0" cy="0"/>
+          <a:chOff x="0" y="0"/>
+          <a:chExt cx="0" cy="0"/>
+        </a:xfrm>
+      </p:grpSpPr>
+      <p:sp>
+        <p:nvSpPr>
+          <p:cNvPr id="2" name="제목 1">
+            <a:extLst>
+              <a:ext uri="{FF2B5EF4-FFF2-40B4-BE49-F238E27FC236}">
+                <a16:creationId xmlns:a16="http://schemas.microsoft.com/office/drawing/2014/main" id="{78B73D98-9A61-479D-A627-D816C25A9F4B}"/>
+              </a:ext>
+            </a:extLst>
+          </p:cNvPr>
+          <p:cNvSpPr>
+            <a:spLocks noGrp="1"/>
+          </p:cNvSpPr>
+          <p:nvPr>
+            <p:ph type="title"/>
+          </p:nvPr>
+        </p:nvSpPr>
+        <p:spPr/>
+        <p:txBody>
+          <a:bodyPr/>
+          <a:lstStyle/>
+          <a:p>
+            <a:pPr lvl="0" indent="0" marL="0">
+              <a:buNone/>
+            </a:pPr>
+            <a:r>
+              <a:rPr/>
+              <a:t>복잡한 객체는 제공된 접근 함수를 우선 사용한다</a:t>
+            </a:r>
+          </a:p>
+        </p:txBody>
+      </p:sp>
+      <p:sp>
+        <p:nvSpPr>
+          <p:cNvPr id="3" name="내용 개체 틀 2">
+            <a:extLst>
+              <a:ext uri="{FF2B5EF4-FFF2-40B4-BE49-F238E27FC236}">
+                <a16:creationId xmlns:a16="http://schemas.microsoft.com/office/drawing/2014/main" id="{464D836E-C469-4584-900E-0F0FF86B99E2}"/>
+              </a:ext>
+            </a:extLst>
+          </p:cNvPr>
+          <p:cNvSpPr>
+            <a:spLocks noGrp="1"/>
+          </p:cNvSpPr>
+          <p:nvPr>
+            <p:ph idx="1"/>
+          </p:nvPr>
+        </p:nvSpPr>
+        <p:spPr/>
+        <p:txBody>
+          <a:bodyPr/>
+          <a:lstStyle/>
+          <a:p>
+            <a:pPr lvl="0"/>
+            <a:r>
+              <a:rPr/>
+              <a:t>객체 내부 구조는 패키지 버전에 따라 달라질 수 있습니다.</a:t>
+            </a:r>
+          </a:p>
+          <a:p>
+            <a:pPr lvl="0"/>
+            <a:r>
+              <a:rPr/>
+              <a:t>내부 위치를 직접 수정하면 객체의 일관성이 깨질 수 있습니다.</a:t>
+            </a:r>
+          </a:p>
+          <a:p>
+            <a:pPr lvl="0"/>
+            <a:r>
+              <a:rPr/>
+              <a:t>패키지가 제공하는 함수와 공식 도움말을 우선 사용합니다.</a:t>
+            </a:r>
+          </a:p>
+          <a:p>
+            <a:pPr lvl="0"/>
+            <a:r>
+              <a:rPr/>
+              <a:t>문제가 생기면 </a:t>
+            </a:r>
+            <a:r>
+              <a:rPr>
+                <a:latin typeface="Courier"/>
+              </a:rPr>
+              <a:t>class()</a:t>
+            </a:r>
+            <a:r>
+              <a:rPr/>
+              <a:t>, </a:t>
+            </a:r>
+            <a:r>
+              <a:rPr>
+                <a:latin typeface="Courier"/>
+              </a:rPr>
+              <a:t>str()</a:t>
+            </a:r>
+            <a:r>
+              <a:rPr/>
+              <a:t>, 패키지 버전을 함께 확인합니다.</a:t>
+            </a:r>
+          </a:p>
+        </p:txBody>
+      </p:sp>
+    </p:spTree>
+  </p:cSld>
+</p:sld>
+</file>
+
+<file path=ppt/slides/slide54.xml><?xml version="1.0" encoding="utf-8"?>
+<p:sld xmlns:a="http://schemas.openxmlformats.org/drawingml/2006/main" xmlns:r="http://schemas.openxmlformats.org/officeDocument/2006/relationships" xmlns:p="http://schemas.openxmlformats.org/presentationml/2006/main">
+  <p:cSld>
+    <p:spTree>
+      <p:nvGrpSpPr>
+        <p:cNvPr id="1" name=""/>
+        <p:cNvGrpSpPr/>
+        <p:nvPr/>
+      </p:nvGrpSpPr>
+      <p:grpSpPr>
+        <a:xfrm>
+          <a:off x="0" y="0"/>
+          <a:ext cx="0" cy="0"/>
+          <a:chOff x="0" y="0"/>
+          <a:chExt cx="0" cy="0"/>
+        </a:xfrm>
+      </p:grpSpPr>
+      <p:sp>
+        <p:nvSpPr>
+          <p:cNvPr id="2" name="제목 1">
+            <a:extLst>
+              <a:ext uri="{FF2B5EF4-FFF2-40B4-BE49-F238E27FC236}">
+                <a16:creationId xmlns:a16="http://schemas.microsoft.com/office/drawing/2014/main" id="{78B73D98-9A61-479D-A627-D816C25A9F4B}"/>
+              </a:ext>
+            </a:extLst>
+          </p:cNvPr>
+          <p:cNvSpPr>
+            <a:spLocks noGrp="1"/>
+          </p:cNvSpPr>
+          <p:nvPr>
+            <p:ph type="title"/>
+          </p:nvPr>
+        </p:nvSpPr>
+        <p:spPr/>
+        <p:txBody>
+          <a:bodyPr/>
+          <a:lstStyle/>
+          <a:p>
+            <a:pPr lvl="0" indent="0" marL="0">
+              <a:buNone/>
+            </a:pPr>
+            <a:r>
+              <a:rPr/>
+              <a:t>CSV는 복합 객체 전체를 저장할 수 없다</a:t>
+            </a:r>
+          </a:p>
+        </p:txBody>
+      </p:sp>
+      <p:sp>
+        <p:nvSpPr>
+          <p:cNvPr id="3" name="내용 개체 틀 2">
+            <a:extLst>
+              <a:ext uri="{FF2B5EF4-FFF2-40B4-BE49-F238E27FC236}">
+                <a16:creationId xmlns:a16="http://schemas.microsoft.com/office/drawing/2014/main" id="{464D836E-C469-4584-900E-0F0FF86B99E2}"/>
+              </a:ext>
+            </a:extLst>
+          </p:cNvPr>
+          <p:cNvSpPr>
+            <a:spLocks noGrp="1"/>
+          </p:cNvSpPr>
+          <p:nvPr>
+            <p:ph idx="1"/>
+          </p:nvPr>
+        </p:nvSpPr>
+        <p:spPr/>
+        <p:txBody>
+          <a:bodyPr/>
+          <a:lstStyle/>
+          <a:p>
+            <a:pPr lvl="0"/>
+            <a:r>
+              <a:rPr/>
+              <a:t>CSV는 하나의 직사각형 표를 저장하기에 적합합니다.</a:t>
+            </a:r>
+          </a:p>
+          <a:p>
+            <a:pPr lvl="0"/>
+            <a:r>
+              <a:rPr/>
+              <a:t>리스트 안의 행렬, 데이터 프레임, 설정값을 한 CSV에 그대로 저장할 수 없습니다.</a:t>
+            </a:r>
+          </a:p>
+          <a:p>
+            <a:pPr lvl="0"/>
+            <a:r>
+              <a:rPr/>
+              <a:t>R 객체 구조 전체를 보존하려면 RDS 형식을 사용할 수 있습니다.</a:t>
+            </a:r>
+          </a:p>
+        </p:txBody>
+      </p:sp>
+    </p:spTree>
+  </p:cSld>
+</p:sld>
+</file>
+
+<file path=ppt/slides/slide55.xml><?xml version="1.0" encoding="utf-8"?>
+<p:sld xmlns:a="http://schemas.openxmlformats.org/drawingml/2006/main" xmlns:r="http://schemas.openxmlformats.org/officeDocument/2006/relationships" xmlns:p="http://schemas.openxmlformats.org/presentationml/2006/main">
+  <p:cSld>
+    <p:spTree>
+      <p:nvGrpSpPr>
+        <p:cNvPr id="1" name=""/>
+        <p:cNvGrpSpPr/>
+        <p:nvPr/>
+      </p:nvGrpSpPr>
+      <p:grpSpPr>
+        <a:xfrm>
+          <a:off x="0" y="0"/>
+          <a:ext cx="0" cy="0"/>
+          <a:chOff x="0" y="0"/>
+          <a:chExt cx="0" cy="0"/>
+        </a:xfrm>
+      </p:grpSpPr>
+      <p:sp>
+        <p:nvSpPr>
+          <p:cNvPr id="2" name="제목 1">
+            <a:extLst>
+              <a:ext uri="{FF2B5EF4-FFF2-40B4-BE49-F238E27FC236}">
+                <a16:creationId xmlns:a16="http://schemas.microsoft.com/office/drawing/2014/main" id="{78B73D98-9A61-479D-A627-D816C25A9F4B}"/>
+              </a:ext>
+            </a:extLst>
+          </p:cNvPr>
+          <p:cNvSpPr>
+            <a:spLocks noGrp="1"/>
+          </p:cNvSpPr>
+          <p:nvPr>
+            <p:ph type="title"/>
+          </p:nvPr>
+        </p:nvSpPr>
+        <p:spPr/>
+        <p:txBody>
+          <a:bodyPr/>
+          <a:lstStyle/>
+          <a:p>
+            <a:pPr lvl="0" indent="0" marL="0">
+              <a:buNone/>
+            </a:pPr>
+            <a:r>
+              <a:rPr>
+                <a:latin typeface="Courier"/>
+              </a:rPr>
+              <a:t>saveRDS()</a:t>
+            </a:r>
+            <a:r>
+              <a:rPr/>
+              <a:t>로 객체 하나를 저장한다</a:t>
+            </a:r>
+          </a:p>
+        </p:txBody>
+      </p:sp>
+      <p:sp>
+        <p:nvSpPr>
+          <p:cNvPr id="3" name="내용 개체 틀 2">
+            <a:extLst>
+              <a:ext uri="{FF2B5EF4-FFF2-40B4-BE49-F238E27FC236}">
+                <a16:creationId xmlns:a16="http://schemas.microsoft.com/office/drawing/2014/main" id="{464D836E-C469-4584-900E-0F0FF86B99E2}"/>
+              </a:ext>
+            </a:extLst>
+          </p:cNvPr>
+          <p:cNvSpPr>
+            <a:spLocks noGrp="1"/>
+          </p:cNvSpPr>
+          <p:nvPr>
+            <p:ph idx="1"/>
+          </p:nvPr>
+        </p:nvSpPr>
+        <p:spPr/>
+        <p:txBody>
+          <a:bodyPr/>
+          <a:lstStyle/>
+          <a:p>
+            <a:pPr lvl="0" indent="0">
+              <a:buNone/>
+            </a:pPr>
+            <a:r>
+              <a:rPr>
+                <a:solidFill>
+                  <a:srgbClr val="4758AB"/>
+                </a:solidFill>
+                <a:latin typeface="Courier"/>
+              </a:rPr>
+              <a:t>dir.create</a:t>
+            </a:r>
+            <a:r>
+              <a:rPr>
+                <a:solidFill>
+                  <a:srgbClr val="003B4F"/>
+                </a:solidFill>
+                <a:latin typeface="Courier"/>
+              </a:rPr>
+              <a:t>(</a:t>
+            </a:r>
+            <a:r>
+              <a:rPr>
+                <a:solidFill>
+                  <a:srgbClr val="20794D"/>
+                </a:solidFill>
+                <a:latin typeface="Courier"/>
+              </a:rPr>
+              <a:t>"results"</a:t>
+            </a:r>
+            <a:r>
+              <a:rPr>
+                <a:solidFill>
+                  <a:srgbClr val="003B4F"/>
+                </a:solidFill>
+                <a:latin typeface="Courier"/>
+              </a:rPr>
+              <a:t>, </a:t>
+            </a:r>
+            <a:r>
+              <a:rPr>
+                <a:solidFill>
+                  <a:srgbClr val="657422"/>
+                </a:solidFill>
+                <a:latin typeface="Courier"/>
+              </a:rPr>
+              <a:t>showWarnings =</a:t>
+            </a:r>
+            <a:r>
+              <a:rPr>
+                <a:solidFill>
+                  <a:srgbClr val="003B4F"/>
+                </a:solidFill>
+                <a:latin typeface="Courier"/>
+              </a:rPr>
+              <a:t> </a:t>
+            </a:r>
+            <a:r>
+              <a:rPr>
+                <a:solidFill>
+                  <a:srgbClr val="8F5902"/>
+                </a:solidFill>
+                <a:latin typeface="Courier"/>
+              </a:rPr>
+              <a:t>FALSE</a:t>
+            </a:r>
+            <a:r>
+              <a:rPr>
+                <a:solidFill>
+                  <a:srgbClr val="003B4F"/>
+                </a:solidFill>
+                <a:latin typeface="Courier"/>
+              </a:rPr>
+              <a:t>)</a:t>
+            </a:r>
+            <a:br/>
+            <a:br/>
+            <a:r>
+              <a:rPr>
+                <a:solidFill>
+                  <a:srgbClr val="4758AB"/>
+                </a:solidFill>
+                <a:latin typeface="Courier"/>
+              </a:rPr>
+              <a:t>saveRDS</a:t>
+            </a:r>
+            <a:r>
+              <a:rPr>
+                <a:solidFill>
+                  <a:srgbClr val="003B4F"/>
+                </a:solidFill>
+                <a:latin typeface="Courier"/>
+              </a:rPr>
+              <a:t>(</a:t>
+            </a:r>
+            <a:br/>
+            <a:r>
+              <a:rPr>
+                <a:solidFill>
+                  <a:srgbClr val="003B4F"/>
+                </a:solidFill>
+                <a:latin typeface="Courier"/>
+              </a:rPr>
+              <a:t>  analysis_result,</a:t>
+            </a:r>
+            <a:br/>
+            <a:r>
+              <a:rPr>
+                <a:solidFill>
+                  <a:srgbClr val="003B4F"/>
+                </a:solidFill>
+                <a:latin typeface="Courier"/>
+              </a:rPr>
+              <a:t>  </a:t>
+            </a:r>
+            <a:r>
+              <a:rPr>
+                <a:solidFill>
+                  <a:srgbClr val="20794D"/>
+                </a:solidFill>
+                <a:latin typeface="Courier"/>
+              </a:rPr>
+              <a:t>"results/analysis_result.rds"</a:t>
+            </a:r>
+            <a:br/>
+            <a:r>
+              <a:rPr>
+                <a:solidFill>
+                  <a:srgbClr val="003B4F"/>
+                </a:solidFill>
+                <a:latin typeface="Courier"/>
+              </a:rPr>
+              <a:t>)</a:t>
+            </a:r>
+          </a:p>
+          <a:p>
+            <a:pPr lvl="0" indent="0" marL="0">
+              <a:buNone/>
+            </a:pPr>
+            <a:r>
+              <a:rPr/>
+              <a:t>RDS 파일은 객체의 자료형과 중첩 구조를 함께 보존합니다.</a:t>
+            </a:r>
+          </a:p>
+        </p:txBody>
+      </p:sp>
+    </p:spTree>
+  </p:cSld>
+</p:sld>
+</file>
+
+<file path=ppt/slides/slide56.xml><?xml version="1.0" encoding="utf-8"?>
+<p:sld xmlns:a="http://schemas.openxmlformats.org/drawingml/2006/main" xmlns:r="http://schemas.openxmlformats.org/officeDocument/2006/relationships" xmlns:p="http://schemas.openxmlformats.org/presentationml/2006/main">
+  <p:cSld>
+    <p:spTree>
+      <p:nvGrpSpPr>
+        <p:cNvPr id="1" name=""/>
+        <p:cNvGrpSpPr/>
+        <p:nvPr/>
+      </p:nvGrpSpPr>
+      <p:grpSpPr>
+        <a:xfrm>
+          <a:off x="0" y="0"/>
+          <a:ext cx="0" cy="0"/>
+          <a:chOff x="0" y="0"/>
+          <a:chExt cx="0" cy="0"/>
+        </a:xfrm>
+      </p:grpSpPr>
+      <p:sp>
+        <p:nvSpPr>
+          <p:cNvPr id="2" name="제목 1">
+            <a:extLst>
+              <a:ext uri="{FF2B5EF4-FFF2-40B4-BE49-F238E27FC236}">
+                <a16:creationId xmlns:a16="http://schemas.microsoft.com/office/drawing/2014/main" id="{78B73D98-9A61-479D-A627-D816C25A9F4B}"/>
+              </a:ext>
+            </a:extLst>
+          </p:cNvPr>
+          <p:cNvSpPr>
+            <a:spLocks noGrp="1"/>
+          </p:cNvSpPr>
+          <p:nvPr>
+            <p:ph type="title"/>
+          </p:nvPr>
+        </p:nvSpPr>
+        <p:spPr/>
+        <p:txBody>
+          <a:bodyPr/>
+          <a:lstStyle/>
+          <a:p>
+            <a:pPr lvl="0" indent="0" marL="0">
+              <a:buNone/>
+            </a:pPr>
+            <a:r>
+              <a:rPr>
+                <a:latin typeface="Courier"/>
+              </a:rPr>
+              <a:t>readRDS()</a:t>
+            </a:r>
+            <a:r>
+              <a:rPr/>
+              <a:t>로 객체를 다시 불러온다</a:t>
+            </a:r>
+          </a:p>
+        </p:txBody>
+      </p:sp>
+      <p:sp>
+        <p:nvSpPr>
+          <p:cNvPr id="3" name="내용 개체 틀 2">
+            <a:extLst>
+              <a:ext uri="{FF2B5EF4-FFF2-40B4-BE49-F238E27FC236}">
+                <a16:creationId xmlns:a16="http://schemas.microsoft.com/office/drawing/2014/main" id="{464D836E-C469-4584-900E-0F0FF86B99E2}"/>
+              </a:ext>
+            </a:extLst>
+          </p:cNvPr>
+          <p:cNvSpPr>
+            <a:spLocks noGrp="1"/>
+          </p:cNvSpPr>
+          <p:nvPr>
+            <p:ph idx="1"/>
+          </p:nvPr>
+        </p:nvSpPr>
+        <p:spPr/>
+        <p:txBody>
+          <a:bodyPr/>
+          <a:lstStyle/>
+          <a:p>
+            <a:pPr lvl="0" indent="0">
+              <a:buNone/>
+            </a:pPr>
+            <a:r>
+              <a:rPr>
+                <a:solidFill>
+                  <a:srgbClr val="003B4F"/>
+                </a:solidFill>
+                <a:latin typeface="Courier"/>
+              </a:rPr>
+              <a:t>restored_result &lt;- </a:t>
+            </a:r>
+            <a:r>
+              <a:rPr>
+                <a:solidFill>
+                  <a:srgbClr val="4758AB"/>
+                </a:solidFill>
+                <a:latin typeface="Courier"/>
+              </a:rPr>
+              <a:t>readRDS</a:t>
+            </a:r>
+            <a:r>
+              <a:rPr>
+                <a:solidFill>
+                  <a:srgbClr val="003B4F"/>
+                </a:solidFill>
+                <a:latin typeface="Courier"/>
+              </a:rPr>
+              <a:t>(</a:t>
+            </a:r>
+            <a:r>
+              <a:rPr>
+                <a:solidFill>
+                  <a:srgbClr val="20794D"/>
+                </a:solidFill>
+                <a:latin typeface="Courier"/>
+              </a:rPr>
+              <a:t>"results/analysis_result.rds"</a:t>
+            </a:r>
+            <a:r>
+              <a:rPr>
+                <a:solidFill>
+                  <a:srgbClr val="003B4F"/>
+                </a:solidFill>
+                <a:latin typeface="Courier"/>
+              </a:rPr>
+              <a:t>)</a:t>
+            </a:r>
+            <a:br/>
+            <a:br/>
+            <a:r>
+              <a:rPr>
+                <a:solidFill>
+                  <a:srgbClr val="4758AB"/>
+                </a:solidFill>
+                <a:latin typeface="Courier"/>
+              </a:rPr>
+              <a:t>class</a:t>
+            </a:r>
+            <a:r>
+              <a:rPr>
+                <a:solidFill>
+                  <a:srgbClr val="003B4F"/>
+                </a:solidFill>
+                <a:latin typeface="Courier"/>
+              </a:rPr>
+              <a:t>(restored_result)</a:t>
+            </a:r>
+            <a:br/>
+            <a:r>
+              <a:rPr>
+                <a:solidFill>
+                  <a:srgbClr val="4758AB"/>
+                </a:solidFill>
+                <a:latin typeface="Courier"/>
+              </a:rPr>
+              <a:t>names</a:t>
+            </a:r>
+            <a:r>
+              <a:rPr>
+                <a:solidFill>
+                  <a:srgbClr val="003B4F"/>
+                </a:solidFill>
+                <a:latin typeface="Courier"/>
+              </a:rPr>
+              <a:t>(restored_result)</a:t>
+            </a:r>
+            <a:br/>
+            <a:r>
+              <a:rPr>
+                <a:solidFill>
+                  <a:srgbClr val="4758AB"/>
+                </a:solidFill>
+                <a:latin typeface="Courier"/>
+              </a:rPr>
+              <a:t>str</a:t>
+            </a:r>
+            <a:r>
+              <a:rPr>
+                <a:solidFill>
+                  <a:srgbClr val="003B4F"/>
+                </a:solidFill>
+                <a:latin typeface="Courier"/>
+              </a:rPr>
+              <a:t>(restored_result, </a:t>
+            </a:r>
+            <a:r>
+              <a:rPr>
+                <a:solidFill>
+                  <a:srgbClr val="657422"/>
+                </a:solidFill>
+                <a:latin typeface="Courier"/>
+              </a:rPr>
+              <a:t>max.level =</a:t>
+            </a:r>
+            <a:r>
+              <a:rPr>
+                <a:solidFill>
+                  <a:srgbClr val="003B4F"/>
+                </a:solidFill>
+                <a:latin typeface="Courier"/>
+              </a:rPr>
+              <a:t> </a:t>
+            </a:r>
+            <a:r>
+              <a:rPr>
+                <a:solidFill>
+                  <a:srgbClr val="AD0000"/>
+                </a:solidFill>
+                <a:latin typeface="Courier"/>
+              </a:rPr>
+              <a:t>2</a:t>
+            </a:r>
+            <a:r>
+              <a:rPr>
+                <a:solidFill>
+                  <a:srgbClr val="003B4F"/>
+                </a:solidFill>
+                <a:latin typeface="Courier"/>
+              </a:rPr>
+              <a:t>)</a:t>
+            </a:r>
+          </a:p>
+          <a:p>
+            <a:pPr lvl="0" indent="0" marL="0">
+              <a:buNone/>
+            </a:pPr>
+            <a:r>
+              <a:rPr>
+                <a:latin typeface="Courier"/>
+              </a:rPr>
+              <a:t>readRDS()</a:t>
+            </a:r>
+            <a:r>
+              <a:rPr/>
+              <a:t>의 결과를 원하는 변수 이름에 저장합니다.</a:t>
+            </a:r>
+          </a:p>
+        </p:txBody>
+      </p:sp>
+    </p:spTree>
+  </p:cSld>
+</p:sld>
+</file>
+
+<file path=ppt/slides/slide57.xml><?xml version="1.0" encoding="utf-8"?>
+<p:sld xmlns:a="http://schemas.openxmlformats.org/drawingml/2006/main" xmlns:r="http://schemas.openxmlformats.org/officeDocument/2006/relationships" xmlns:p="http://schemas.openxmlformats.org/presentationml/2006/main">
+  <p:cSld>
+    <p:spTree>
+      <p:nvGrpSpPr>
+        <p:cNvPr id="1" name=""/>
+        <p:cNvGrpSpPr/>
+        <p:nvPr/>
+      </p:nvGrpSpPr>
+      <p:grpSpPr>
+        <a:xfrm>
+          <a:off x="0" y="0"/>
+          <a:ext cx="0" cy="0"/>
+          <a:chOff x="0" y="0"/>
+          <a:chExt cx="0" cy="0"/>
+        </a:xfrm>
+      </p:grpSpPr>
+      <p:sp>
+        <p:nvSpPr>
+          <p:cNvPr id="2" name="제목 1">
+            <a:extLst>
+              <a:ext uri="{FF2B5EF4-FFF2-40B4-BE49-F238E27FC236}">
+                <a16:creationId xmlns:a16="http://schemas.microsoft.com/office/drawing/2014/main" id="{78B73D98-9A61-479D-A627-D816C25A9F4B}"/>
+              </a:ext>
+            </a:extLst>
+          </p:cNvPr>
+          <p:cNvSpPr>
+            <a:spLocks noGrp="1"/>
+          </p:cNvSpPr>
+          <p:nvPr>
+            <p:ph type="title"/>
+          </p:nvPr>
+        </p:nvSpPr>
+        <p:spPr/>
+        <p:txBody>
+          <a:bodyPr/>
+          <a:lstStyle/>
+          <a:p>
+            <a:pPr lvl="0" indent="0" marL="0">
+              <a:buNone/>
+            </a:pPr>
+            <a:r>
+              <a:rPr/>
+              <a:t>저장 전후 객체가 같은지 확인한다</a:t>
+            </a:r>
+          </a:p>
+        </p:txBody>
+      </p:sp>
+      <p:sp>
+        <p:nvSpPr>
+          <p:cNvPr id="3" name="내용 개체 틀 2">
+            <a:extLst>
+              <a:ext uri="{FF2B5EF4-FFF2-40B4-BE49-F238E27FC236}">
+                <a16:creationId xmlns:a16="http://schemas.microsoft.com/office/drawing/2014/main" id="{464D836E-C469-4584-900E-0F0FF86B99E2}"/>
+              </a:ext>
+            </a:extLst>
+          </p:cNvPr>
+          <p:cNvSpPr>
+            <a:spLocks noGrp="1"/>
+          </p:cNvSpPr>
+          <p:nvPr>
+            <p:ph idx="1"/>
+          </p:nvPr>
+        </p:nvSpPr>
+        <p:spPr/>
+        <p:txBody>
+          <a:bodyPr/>
+          <a:lstStyle/>
+          <a:p>
+            <a:pPr lvl="0" indent="0">
+              <a:buNone/>
+            </a:pPr>
+            <a:r>
+              <a:rPr>
+                <a:solidFill>
+                  <a:srgbClr val="4758AB"/>
+                </a:solidFill>
+                <a:latin typeface="Courier"/>
+              </a:rPr>
+              <a:t>identical</a:t>
+            </a:r>
+            <a:r>
+              <a:rPr>
+                <a:solidFill>
+                  <a:srgbClr val="003B4F"/>
+                </a:solidFill>
+                <a:latin typeface="Courier"/>
+              </a:rPr>
+              <a:t>(analysis_result, restored_result)</a:t>
+            </a:r>
+          </a:p>
+          <a:p>
+            <a:pPr lvl="0" indent="0" marL="0">
+              <a:buNone/>
+            </a:pPr>
+            <a:r>
+              <a:rPr>
+                <a:latin typeface="Courier"/>
+              </a:rPr>
+              <a:t>TRUE</a:t>
+            </a:r>
+            <a:r>
+              <a:rPr/>
+              <a:t>이면 자료형과 값, 구조가 모두 같습니다.</a:t>
+            </a:r>
+          </a:p>
+        </p:txBody>
+      </p:sp>
+    </p:spTree>
+  </p:cSld>
+</p:sld>
+</file>
+
+<file path=ppt/slides/slide58.xml><?xml version="1.0" encoding="utf-8"?>
 <p:sld xmlns:a="http://schemas.openxmlformats.org/drawingml/2006/main" xmlns:r="http://schemas.openxmlformats.org/officeDocument/2006/relationships" xmlns:p="http://schemas.openxmlformats.org/presentationml/2006/main">
   <p:cSld>
     <p:spTree>
@@ -14842,941 +16393,6 @@
 </p:sld>
 </file>
 
-<file path=ppt/slides/slide54.xml><?xml version="1.0" encoding="utf-8"?>
-<p:sld xmlns:a="http://schemas.openxmlformats.org/drawingml/2006/main" xmlns:r="http://schemas.openxmlformats.org/officeDocument/2006/relationships" xmlns:p="http://schemas.openxmlformats.org/presentationml/2006/main">
-  <p:cSld>
-    <p:spTree>
-      <p:nvGrpSpPr>
-        <p:cNvPr id="1" name=""/>
-        <p:cNvGrpSpPr/>
-        <p:nvPr/>
-      </p:nvGrpSpPr>
-      <p:grpSpPr>
-        <a:xfrm>
-          <a:off x="0" y="0"/>
-          <a:ext cx="0" cy="0"/>
-          <a:chOff x="0" y="0"/>
-          <a:chExt cx="0" cy="0"/>
-        </a:xfrm>
-      </p:grpSpPr>
-      <p:sp>
-        <p:nvSpPr>
-          <p:cNvPr id="3" name="내용 개체 틀 2">
-            <a:extLst>
-              <a:ext uri="{FF2B5EF4-FFF2-40B4-BE49-F238E27FC236}">
-                <a16:creationId xmlns:a16="http://schemas.microsoft.com/office/drawing/2014/main" id="{464D836E-C469-4584-900E-0F0FF86B99E2}"/>
-              </a:ext>
-            </a:extLst>
-          </p:cNvPr>
-          <p:cNvSpPr>
-            <a:spLocks noGrp="1"/>
-          </p:cNvSpPr>
-          <p:nvPr>
-            <p:ph idx="1"/>
-          </p:nvPr>
-        </p:nvSpPr>
-        <p:spPr/>
-        <p:txBody>
-          <a:bodyPr/>
-          <a:lstStyle/>
-          <a:p>
-            <a:pPr lvl="0" indent="0" marL="0">
-              <a:buNone/>
-            </a:pPr>
-            <a:r>
-              <a:rPr/>
-              <a:t>공유 목적과 다시 사용할 방법을 고려해 저장 형식을 선택합니다.</a:t>
-            </a:r>
-          </a:p>
-        </p:txBody>
-      </p:sp>
-    </p:spTree>
-  </p:cSld>
-</p:sld>
-</file>
-
-<file path=ppt/slides/slide55.xml><?xml version="1.0" encoding="utf-8"?>
-<p:sld xmlns:a="http://schemas.openxmlformats.org/drawingml/2006/main" xmlns:r="http://schemas.openxmlformats.org/officeDocument/2006/relationships" xmlns:p="http://schemas.openxmlformats.org/presentationml/2006/main">
-  <p:cSld>
-    <p:spTree>
-      <p:nvGrpSpPr>
-        <p:cNvPr id="1" name=""/>
-        <p:cNvGrpSpPr/>
-        <p:nvPr/>
-      </p:nvGrpSpPr>
-      <p:grpSpPr>
-        <a:xfrm>
-          <a:off x="0" y="0"/>
-          <a:ext cx="0" cy="0"/>
-          <a:chOff x="0" y="0"/>
-          <a:chExt cx="0" cy="0"/>
-        </a:xfrm>
-      </p:grpSpPr>
-      <p:sp>
-        <p:nvSpPr>
-          <p:cNvPr id="2" name="제목 1">
-            <a:extLst>
-              <a:ext uri="{FF2B5EF4-FFF2-40B4-BE49-F238E27FC236}">
-                <a16:creationId xmlns:a16="http://schemas.microsoft.com/office/drawing/2014/main" id="{78B73D98-9A61-479D-A627-D816C25A9F4B}"/>
-              </a:ext>
-            </a:extLst>
-          </p:cNvPr>
-          <p:cNvSpPr>
-            <a:spLocks noGrp="1"/>
-          </p:cNvSpPr>
-          <p:nvPr>
-            <p:ph type="title"/>
-          </p:nvPr>
-        </p:nvSpPr>
-        <p:spPr/>
-        <p:txBody>
-          <a:bodyPr/>
-          <a:lstStyle/>
-          <a:p>
-            <a:pPr lvl="0" indent="0" marL="0">
-              <a:buNone/>
-            </a:pPr>
-            <a:r>
-              <a:rPr/>
-              <a:t>흔한 오류 1: 설치와 불러오기를 혼동한다</a:t>
-            </a:r>
-          </a:p>
-        </p:txBody>
-      </p:sp>
-      <p:sp>
-        <p:nvSpPr>
-          <p:cNvPr id="3" name="내용 개체 틀 2">
-            <a:extLst>
-              <a:ext uri="{FF2B5EF4-FFF2-40B4-BE49-F238E27FC236}">
-                <a16:creationId xmlns:a16="http://schemas.microsoft.com/office/drawing/2014/main" id="{464D836E-C469-4584-900E-0F0FF86B99E2}"/>
-              </a:ext>
-            </a:extLst>
-          </p:cNvPr>
-          <p:cNvSpPr>
-            <a:spLocks noGrp="1"/>
-          </p:cNvSpPr>
-          <p:nvPr>
-            <p:ph idx="1"/>
-          </p:nvPr>
-        </p:nvSpPr>
-        <p:spPr/>
-        <p:txBody>
-          <a:bodyPr/>
-          <a:lstStyle/>
-          <a:p>
-            <a:pPr lvl="0" indent="0">
-              <a:buNone/>
-            </a:pPr>
-            <a:r>
-              <a:rPr>
-                <a:solidFill>
-                  <a:srgbClr val="5E5E5E"/>
-                </a:solidFill>
-                <a:latin typeface="Courier"/>
-              </a:rPr>
-              <a:t># 한 번 설치</a:t>
-            </a:r>
-            <a:br/>
-            <a:r>
-              <a:rPr>
-                <a:solidFill>
-                  <a:srgbClr val="5E5E5E"/>
-                </a:solidFill>
-                <a:latin typeface="Courier"/>
-              </a:rPr>
-              <a:t># install.packages("package_name")</a:t>
-            </a:r>
-            <a:br/>
-            <a:br/>
-            <a:r>
-              <a:rPr>
-                <a:solidFill>
-                  <a:srgbClr val="5E5E5E"/>
-                </a:solidFill>
-                <a:latin typeface="Courier"/>
-              </a:rPr>
-              <a:t># 새 R 세션에서 불러오기</a:t>
-            </a:r>
-            <a:br/>
-            <a:r>
-              <a:rPr>
-                <a:solidFill>
-                  <a:srgbClr val="5E5E5E"/>
-                </a:solidFill>
-                <a:latin typeface="Courier"/>
-              </a:rPr>
-              <a:t># library(package_name)</a:t>
-            </a:r>
-          </a:p>
-          <a:p>
-            <a:pPr lvl="0" indent="0" marL="0">
-              <a:buNone/>
-            </a:pPr>
-            <a:r>
-              <a:rPr/>
-              <a:t>설치 명령을 분석 스크립트가 실행될 때마다 반복하지 않습니다.</a:t>
-            </a:r>
-          </a:p>
-        </p:txBody>
-      </p:sp>
-    </p:spTree>
-  </p:cSld>
-</p:sld>
-</file>
-
-<file path=ppt/slides/slide56.xml><?xml version="1.0" encoding="utf-8"?>
-<p:sld xmlns:a="http://schemas.openxmlformats.org/drawingml/2006/main" xmlns:r="http://schemas.openxmlformats.org/officeDocument/2006/relationships" xmlns:p="http://schemas.openxmlformats.org/presentationml/2006/main">
-  <p:cSld>
-    <p:spTree>
-      <p:nvGrpSpPr>
-        <p:cNvPr id="1" name=""/>
-        <p:cNvGrpSpPr/>
-        <p:nvPr/>
-      </p:nvGrpSpPr>
-      <p:grpSpPr>
-        <a:xfrm>
-          <a:off x="0" y="0"/>
-          <a:ext cx="0" cy="0"/>
-          <a:chOff x="0" y="0"/>
-          <a:chExt cx="0" cy="0"/>
-        </a:xfrm>
-      </p:grpSpPr>
-      <p:sp>
-        <p:nvSpPr>
-          <p:cNvPr id="2" name="제목 1">
-            <a:extLst>
-              <a:ext uri="{FF2B5EF4-FFF2-40B4-BE49-F238E27FC236}">
-                <a16:creationId xmlns:a16="http://schemas.microsoft.com/office/drawing/2014/main" id="{78B73D98-9A61-479D-A627-D816C25A9F4B}"/>
-              </a:ext>
-            </a:extLst>
-          </p:cNvPr>
-          <p:cNvSpPr>
-            <a:spLocks noGrp="1"/>
-          </p:cNvSpPr>
-          <p:nvPr>
-            <p:ph type="title"/>
-          </p:nvPr>
-        </p:nvSpPr>
-        <p:spPr/>
-        <p:txBody>
-          <a:bodyPr/>
-          <a:lstStyle/>
-          <a:p>
-            <a:pPr lvl="0" indent="0" marL="0">
-              <a:buNone/>
-            </a:pPr>
-            <a:r>
-              <a:rPr/>
-              <a:t>흔한 오류 2: </a:t>
-            </a:r>
-            <a:r>
-              <a:rPr>
-                <a:latin typeface="Courier"/>
-              </a:rPr>
-              <a:t>[ ]</a:t>
-            </a:r>
-            <a:r>
-              <a:rPr/>
-              <a:t>와 </a:t>
-            </a:r>
-            <a:r>
-              <a:rPr>
-                <a:latin typeface="Courier"/>
-              </a:rPr>
-              <a:t>[[ ]]</a:t>
-            </a:r>
-            <a:r>
-              <a:rPr/>
-              <a:t>를 혼동한다</a:t>
-            </a:r>
-          </a:p>
-        </p:txBody>
-      </p:sp>
-      <p:sp>
-        <p:nvSpPr>
-          <p:cNvPr id="3" name="내용 개체 틀 2">
-            <a:extLst>
-              <a:ext uri="{FF2B5EF4-FFF2-40B4-BE49-F238E27FC236}">
-                <a16:creationId xmlns:a16="http://schemas.microsoft.com/office/drawing/2014/main" id="{464D836E-C469-4584-900E-0F0FF86B99E2}"/>
-              </a:ext>
-            </a:extLst>
-          </p:cNvPr>
-          <p:cNvSpPr>
-            <a:spLocks noGrp="1"/>
-          </p:cNvSpPr>
-          <p:nvPr>
-            <p:ph idx="1"/>
-          </p:nvPr>
-        </p:nvSpPr>
-        <p:spPr/>
-        <p:txBody>
-          <a:bodyPr/>
-          <a:lstStyle/>
-          <a:p>
-            <a:pPr lvl="0" indent="0">
-              <a:buNone/>
-            </a:pPr>
-            <a:r>
-              <a:rPr>
-                <a:solidFill>
-                  <a:srgbClr val="4758AB"/>
-                </a:solidFill>
-                <a:latin typeface="Courier"/>
-              </a:rPr>
-              <a:t>class</a:t>
-            </a:r>
-            <a:r>
-              <a:rPr>
-                <a:solidFill>
-                  <a:srgbClr val="003B4F"/>
-                </a:solidFill>
-                <a:latin typeface="Courier"/>
-              </a:rPr>
-              <a:t>(sample_result[</a:t>
-            </a:r>
-            <a:r>
-              <a:rPr>
-                <a:solidFill>
-                  <a:srgbClr val="20794D"/>
-                </a:solidFill>
-                <a:latin typeface="Courier"/>
-              </a:rPr>
-              <a:t>"cell_count"</a:t>
-            </a:r>
-            <a:r>
-              <a:rPr>
-                <a:solidFill>
-                  <a:srgbClr val="003B4F"/>
-                </a:solidFill>
-                <a:latin typeface="Courier"/>
-              </a:rPr>
-              <a:t>])</a:t>
-            </a:r>
-            <a:br/>
-            <a:r>
-              <a:rPr>
-                <a:solidFill>
-                  <a:srgbClr val="4758AB"/>
-                </a:solidFill>
-                <a:latin typeface="Courier"/>
-              </a:rPr>
-              <a:t>class</a:t>
-            </a:r>
-            <a:r>
-              <a:rPr>
-                <a:solidFill>
-                  <a:srgbClr val="003B4F"/>
-                </a:solidFill>
-                <a:latin typeface="Courier"/>
-              </a:rPr>
-              <a:t>(sample_result[[</a:t>
-            </a:r>
-            <a:r>
-              <a:rPr>
-                <a:solidFill>
-                  <a:srgbClr val="20794D"/>
-                </a:solidFill>
-                <a:latin typeface="Courier"/>
-              </a:rPr>
-              <a:t>"cell_count"</a:t>
-            </a:r>
-            <a:r>
-              <a:rPr>
-                <a:solidFill>
-                  <a:srgbClr val="003B4F"/>
-                </a:solidFill>
-                <a:latin typeface="Courier"/>
-              </a:rPr>
-              <a:t>]])</a:t>
-            </a:r>
-          </a:p>
-          <a:p>
-            <a:pPr lvl="0" indent="0" marL="0">
-              <a:buNone/>
-            </a:pPr>
-            <a:r>
-              <a:rPr/>
-              <a:t>필요한 결과가 리스트인지 원소 내용인지 확인합니다.</a:t>
-            </a:r>
-          </a:p>
-        </p:txBody>
-      </p:sp>
-    </p:spTree>
-  </p:cSld>
-</p:sld>
-</file>
-
-<file path=ppt/slides/slide57.xml><?xml version="1.0" encoding="utf-8"?>
-<p:sld xmlns:a="http://schemas.openxmlformats.org/drawingml/2006/main" xmlns:r="http://schemas.openxmlformats.org/officeDocument/2006/relationships" xmlns:p="http://schemas.openxmlformats.org/presentationml/2006/main">
-  <p:cSld>
-    <p:spTree>
-      <p:nvGrpSpPr>
-        <p:cNvPr id="1" name=""/>
-        <p:cNvGrpSpPr/>
-        <p:nvPr/>
-      </p:nvGrpSpPr>
-      <p:grpSpPr>
-        <a:xfrm>
-          <a:off x="0" y="0"/>
-          <a:ext cx="0" cy="0"/>
-          <a:chOff x="0" y="0"/>
-          <a:chExt cx="0" cy="0"/>
-        </a:xfrm>
-      </p:grpSpPr>
-      <p:sp>
-        <p:nvSpPr>
-          <p:cNvPr id="2" name="제목 1">
-            <a:extLst>
-              <a:ext uri="{FF2B5EF4-FFF2-40B4-BE49-F238E27FC236}">
-                <a16:creationId xmlns:a16="http://schemas.microsoft.com/office/drawing/2014/main" id="{78B73D98-9A61-479D-A627-D816C25A9F4B}"/>
-              </a:ext>
-            </a:extLst>
-          </p:cNvPr>
-          <p:cNvSpPr>
-            <a:spLocks noGrp="1"/>
-          </p:cNvSpPr>
-          <p:nvPr>
-            <p:ph type="title"/>
-          </p:nvPr>
-        </p:nvSpPr>
-        <p:spPr/>
-        <p:txBody>
-          <a:bodyPr/>
-          <a:lstStyle/>
-          <a:p>
-            <a:pPr lvl="0" indent="0" marL="0">
-              <a:buNone/>
-            </a:pPr>
-            <a:r>
-              <a:rPr/>
-              <a:t>흔한 오류 3: 내부 구조를 추측한다</a:t>
-            </a:r>
-          </a:p>
-        </p:txBody>
-      </p:sp>
-      <p:sp>
-        <p:nvSpPr>
-          <p:cNvPr id="3" name="내용 개체 틀 2">
-            <a:extLst>
-              <a:ext uri="{FF2B5EF4-FFF2-40B4-BE49-F238E27FC236}">
-                <a16:creationId xmlns:a16="http://schemas.microsoft.com/office/drawing/2014/main" id="{464D836E-C469-4584-900E-0F0FF86B99E2}"/>
-              </a:ext>
-            </a:extLst>
-          </p:cNvPr>
-          <p:cNvSpPr>
-            <a:spLocks noGrp="1"/>
-          </p:cNvSpPr>
-          <p:nvPr>
-            <p:ph idx="1"/>
-          </p:nvPr>
-        </p:nvSpPr>
-        <p:spPr/>
-        <p:txBody>
-          <a:bodyPr/>
-          <a:lstStyle/>
-          <a:p>
-            <a:pPr lvl="0" indent="0">
-              <a:buNone/>
-            </a:pPr>
-            <a:r>
-              <a:rPr>
-                <a:solidFill>
-                  <a:srgbClr val="4758AB"/>
-                </a:solidFill>
-                <a:latin typeface="Courier"/>
-              </a:rPr>
-              <a:t>class</a:t>
-            </a:r>
-            <a:r>
-              <a:rPr>
-                <a:solidFill>
-                  <a:srgbClr val="003B4F"/>
-                </a:solidFill>
-                <a:latin typeface="Courier"/>
-              </a:rPr>
-              <a:t>(analysis_result)</a:t>
-            </a:r>
-            <a:br/>
-            <a:r>
-              <a:rPr>
-                <a:solidFill>
-                  <a:srgbClr val="4758AB"/>
-                </a:solidFill>
-                <a:latin typeface="Courier"/>
-              </a:rPr>
-              <a:t>names</a:t>
-            </a:r>
-            <a:r>
-              <a:rPr>
-                <a:solidFill>
-                  <a:srgbClr val="003B4F"/>
-                </a:solidFill>
-                <a:latin typeface="Courier"/>
-              </a:rPr>
-              <a:t>(analysis_result)</a:t>
-            </a:r>
-            <a:br/>
-            <a:r>
-              <a:rPr>
-                <a:solidFill>
-                  <a:srgbClr val="4758AB"/>
-                </a:solidFill>
-                <a:latin typeface="Courier"/>
-              </a:rPr>
-              <a:t>str</a:t>
-            </a:r>
-            <a:r>
-              <a:rPr>
-                <a:solidFill>
-                  <a:srgbClr val="003B4F"/>
-                </a:solidFill>
-                <a:latin typeface="Courier"/>
-              </a:rPr>
-              <a:t>(analysis_result, </a:t>
-            </a:r>
-            <a:r>
-              <a:rPr>
-                <a:solidFill>
-                  <a:srgbClr val="657422"/>
-                </a:solidFill>
-                <a:latin typeface="Courier"/>
-              </a:rPr>
-              <a:t>max.level =</a:t>
-            </a:r>
-            <a:r>
-              <a:rPr>
-                <a:solidFill>
-                  <a:srgbClr val="003B4F"/>
-                </a:solidFill>
-                <a:latin typeface="Courier"/>
-              </a:rPr>
-              <a:t> </a:t>
-            </a:r>
-            <a:r>
-              <a:rPr>
-                <a:solidFill>
-                  <a:srgbClr val="AD0000"/>
-                </a:solidFill>
-                <a:latin typeface="Courier"/>
-              </a:rPr>
-              <a:t>2</a:t>
-            </a:r>
-            <a:r>
-              <a:rPr>
-                <a:solidFill>
-                  <a:srgbClr val="003B4F"/>
-                </a:solidFill>
-                <a:latin typeface="Courier"/>
-              </a:rPr>
-              <a:t>)</a:t>
-            </a:r>
-          </a:p>
-          <a:p>
-            <a:pPr lvl="0" indent="0" marL="0">
-              <a:buNone/>
-            </a:pPr>
-            <a:r>
-              <a:rPr/>
-              <a:t>존재하지 않는 이름을 반복해서 시도하기보다 구조와 이름을 먼저 조사합니다.</a:t>
-            </a:r>
-          </a:p>
-        </p:txBody>
-      </p:sp>
-    </p:spTree>
-  </p:cSld>
-</p:sld>
-</file>
-
-<file path=ppt/slides/slide58.xml><?xml version="1.0" encoding="utf-8"?>
-<p:sld xmlns:a="http://schemas.openxmlformats.org/drawingml/2006/main" xmlns:r="http://schemas.openxmlformats.org/officeDocument/2006/relationships" xmlns:p="http://schemas.openxmlformats.org/presentationml/2006/main">
-  <p:cSld>
-    <p:spTree>
-      <p:nvGrpSpPr>
-        <p:cNvPr id="1" name=""/>
-        <p:cNvGrpSpPr/>
-        <p:nvPr/>
-      </p:nvGrpSpPr>
-      <p:grpSpPr>
-        <a:xfrm>
-          <a:off x="0" y="0"/>
-          <a:ext cx="0" cy="0"/>
-          <a:chOff x="0" y="0"/>
-          <a:chExt cx="0" cy="0"/>
-        </a:xfrm>
-      </p:grpSpPr>
-      <p:sp>
-        <p:nvSpPr>
-          <p:cNvPr id="2" name="제목 1">
-            <a:extLst>
-              <a:ext uri="{FF2B5EF4-FFF2-40B4-BE49-F238E27FC236}">
-                <a16:creationId xmlns:a16="http://schemas.microsoft.com/office/drawing/2014/main" id="{78B73D98-9A61-479D-A627-D816C25A9F4B}"/>
-              </a:ext>
-            </a:extLst>
-          </p:cNvPr>
-          <p:cNvSpPr>
-            <a:spLocks noGrp="1"/>
-          </p:cNvSpPr>
-          <p:nvPr>
-            <p:ph type="title"/>
-          </p:nvPr>
-        </p:nvSpPr>
-        <p:spPr/>
-        <p:txBody>
-          <a:bodyPr/>
-          <a:lstStyle/>
-          <a:p>
-            <a:pPr lvl="0" indent="0" marL="0">
-              <a:buNone/>
-            </a:pPr>
-            <a:r>
-              <a:rPr/>
-              <a:t>실습 1: 패키지 상태 확인하기</a:t>
-            </a:r>
-          </a:p>
-        </p:txBody>
-      </p:sp>
-      <p:sp>
-        <p:nvSpPr>
-          <p:cNvPr id="3" name="내용 개체 틀 2">
-            <a:extLst>
-              <a:ext uri="{FF2B5EF4-FFF2-40B4-BE49-F238E27FC236}">
-                <a16:creationId xmlns:a16="http://schemas.microsoft.com/office/drawing/2014/main" id="{464D836E-C469-4584-900E-0F0FF86B99E2}"/>
-              </a:ext>
-            </a:extLst>
-          </p:cNvPr>
-          <p:cNvSpPr>
-            <a:spLocks noGrp="1"/>
-          </p:cNvSpPr>
-          <p:nvPr>
-            <p:ph idx="1"/>
-          </p:nvPr>
-        </p:nvSpPr>
-        <p:spPr/>
-        <p:txBody>
-          <a:bodyPr/>
-          <a:lstStyle/>
-          <a:p>
-            <a:pPr lvl="0" indent="0">
-              <a:buNone/>
-            </a:pPr>
-            <a:r>
-              <a:rPr>
-                <a:solidFill>
-                  <a:srgbClr val="20794D"/>
-                </a:solidFill>
-                <a:latin typeface="Courier"/>
-              </a:rPr>
-              <a:t>"stats"</a:t>
-            </a:r>
-            <a:r>
-              <a:rPr>
-                <a:solidFill>
-                  <a:srgbClr val="003B4F"/>
-                </a:solidFill>
-                <a:latin typeface="Courier"/>
-              </a:rPr>
-              <a:t> </a:t>
-            </a:r>
-            <a:r>
-              <a:rPr>
-                <a:solidFill>
-                  <a:srgbClr val="5E5E5E"/>
-                </a:solidFill>
-                <a:latin typeface="Courier"/>
-              </a:rPr>
-              <a:t>%in%</a:t>
-            </a:r>
-            <a:r>
-              <a:rPr>
-                <a:solidFill>
-                  <a:srgbClr val="003B4F"/>
-                </a:solidFill>
-                <a:latin typeface="Courier"/>
-              </a:rPr>
-              <a:t> </a:t>
-            </a:r>
-            <a:r>
-              <a:rPr>
-                <a:solidFill>
-                  <a:srgbClr val="4758AB"/>
-                </a:solidFill>
-                <a:latin typeface="Courier"/>
-              </a:rPr>
-              <a:t>rownames</a:t>
-            </a:r>
-            <a:r>
-              <a:rPr>
-                <a:solidFill>
-                  <a:srgbClr val="003B4F"/>
-                </a:solidFill>
-                <a:latin typeface="Courier"/>
-              </a:rPr>
-              <a:t>(</a:t>
-            </a:r>
-            <a:r>
-              <a:rPr>
-                <a:solidFill>
-                  <a:srgbClr val="4758AB"/>
-                </a:solidFill>
-                <a:latin typeface="Courier"/>
-              </a:rPr>
-              <a:t>installed.packages</a:t>
-            </a:r>
-            <a:r>
-              <a:rPr>
-                <a:solidFill>
-                  <a:srgbClr val="003B4F"/>
-                </a:solidFill>
-                <a:latin typeface="Courier"/>
-              </a:rPr>
-              <a:t>())</a:t>
-            </a:r>
-            <a:br/>
-            <a:r>
-              <a:rPr>
-                <a:solidFill>
-                  <a:srgbClr val="4758AB"/>
-                </a:solidFill>
-                <a:latin typeface="Courier"/>
-              </a:rPr>
-              <a:t>requireNamespace</a:t>
-            </a:r>
-            <a:r>
-              <a:rPr>
-                <a:solidFill>
-                  <a:srgbClr val="003B4F"/>
-                </a:solidFill>
-                <a:latin typeface="Courier"/>
-              </a:rPr>
-              <a:t>(</a:t>
-            </a:r>
-            <a:r>
-              <a:rPr>
-                <a:solidFill>
-                  <a:srgbClr val="20794D"/>
-                </a:solidFill>
-                <a:latin typeface="Courier"/>
-              </a:rPr>
-              <a:t>"stats"</a:t>
-            </a:r>
-            <a:r>
-              <a:rPr>
-                <a:solidFill>
-                  <a:srgbClr val="003B4F"/>
-                </a:solidFill>
-                <a:latin typeface="Courier"/>
-              </a:rPr>
-              <a:t>, </a:t>
-            </a:r>
-            <a:r>
-              <a:rPr>
-                <a:solidFill>
-                  <a:srgbClr val="657422"/>
-                </a:solidFill>
-                <a:latin typeface="Courier"/>
-              </a:rPr>
-              <a:t>quietly =</a:t>
-            </a:r>
-            <a:r>
-              <a:rPr>
-                <a:solidFill>
-                  <a:srgbClr val="003B4F"/>
-                </a:solidFill>
-                <a:latin typeface="Courier"/>
-              </a:rPr>
-              <a:t> </a:t>
-            </a:r>
-            <a:r>
-              <a:rPr>
-                <a:solidFill>
-                  <a:srgbClr val="8F5902"/>
-                </a:solidFill>
-                <a:latin typeface="Courier"/>
-              </a:rPr>
-              <a:t>TRUE</a:t>
-            </a:r>
-            <a:r>
-              <a:rPr>
-                <a:solidFill>
-                  <a:srgbClr val="003B4F"/>
-                </a:solidFill>
-                <a:latin typeface="Courier"/>
-              </a:rPr>
-              <a:t>)</a:t>
-            </a:r>
-            <a:br/>
-            <a:r>
-              <a:rPr>
-                <a:solidFill>
-                  <a:srgbClr val="4758AB"/>
-                </a:solidFill>
-                <a:latin typeface="Courier"/>
-              </a:rPr>
-              <a:t>packageVersion</a:t>
-            </a:r>
-            <a:r>
-              <a:rPr>
-                <a:solidFill>
-                  <a:srgbClr val="003B4F"/>
-                </a:solidFill>
-                <a:latin typeface="Courier"/>
-              </a:rPr>
-              <a:t>(</a:t>
-            </a:r>
-            <a:r>
-              <a:rPr>
-                <a:solidFill>
-                  <a:srgbClr val="20794D"/>
-                </a:solidFill>
-                <a:latin typeface="Courier"/>
-              </a:rPr>
-              <a:t>"stats"</a:t>
-            </a:r>
-            <a:r>
-              <a:rPr>
-                <a:solidFill>
-                  <a:srgbClr val="003B4F"/>
-                </a:solidFill>
-                <a:latin typeface="Courier"/>
-              </a:rPr>
-              <a:t>)</a:t>
-            </a:r>
-            <a:br/>
-            <a:r>
-              <a:rPr>
-                <a:solidFill>
-                  <a:srgbClr val="003B4F"/>
-                </a:solidFill>
-                <a:latin typeface="Courier"/>
-              </a:rPr>
-              <a:t>stats</a:t>
-            </a:r>
-            <a:r>
-              <a:rPr>
-                <a:solidFill>
-                  <a:srgbClr val="5E5E5E"/>
-                </a:solidFill>
-                <a:latin typeface="Courier"/>
-              </a:rPr>
-              <a:t>::</a:t>
-            </a:r>
-            <a:r>
-              <a:rPr>
-                <a:solidFill>
-                  <a:srgbClr val="4758AB"/>
-                </a:solidFill>
-                <a:latin typeface="Courier"/>
-              </a:rPr>
-              <a:t>median</a:t>
-            </a:r>
-            <a:r>
-              <a:rPr>
-                <a:solidFill>
-                  <a:srgbClr val="003B4F"/>
-                </a:solidFill>
-                <a:latin typeface="Courier"/>
-              </a:rPr>
-              <a:t>(</a:t>
-            </a:r>
-            <a:r>
-              <a:rPr>
-                <a:solidFill>
-                  <a:srgbClr val="4758AB"/>
-                </a:solidFill>
-                <a:latin typeface="Courier"/>
-              </a:rPr>
-              <a:t>c</a:t>
-            </a:r>
-            <a:r>
-              <a:rPr>
-                <a:solidFill>
-                  <a:srgbClr val="003B4F"/>
-                </a:solidFill>
-                <a:latin typeface="Courier"/>
-              </a:rPr>
-              <a:t>(</a:t>
-            </a:r>
-            <a:r>
-              <a:rPr>
-                <a:solidFill>
-                  <a:srgbClr val="AD0000"/>
-                </a:solidFill>
-                <a:latin typeface="Courier"/>
-              </a:rPr>
-              <a:t>1200</a:t>
-            </a:r>
-            <a:r>
-              <a:rPr>
-                <a:solidFill>
-                  <a:srgbClr val="003B4F"/>
-                </a:solidFill>
-                <a:latin typeface="Courier"/>
-              </a:rPr>
-              <a:t>, </a:t>
-            </a:r>
-            <a:r>
-              <a:rPr>
-                <a:solidFill>
-                  <a:srgbClr val="AD0000"/>
-                </a:solidFill>
-                <a:latin typeface="Courier"/>
-              </a:rPr>
-              <a:t>1350</a:t>
-            </a:r>
-            <a:r>
-              <a:rPr>
-                <a:solidFill>
-                  <a:srgbClr val="003B4F"/>
-                </a:solidFill>
-                <a:latin typeface="Courier"/>
-              </a:rPr>
-              <a:t>, </a:t>
-            </a:r>
-            <a:r>
-              <a:rPr>
-                <a:solidFill>
-                  <a:srgbClr val="AD0000"/>
-                </a:solidFill>
-                <a:latin typeface="Courier"/>
-              </a:rPr>
-              <a:t>980</a:t>
-            </a:r>
-            <a:r>
-              <a:rPr>
-                <a:solidFill>
-                  <a:srgbClr val="003B4F"/>
-                </a:solidFill>
-                <a:latin typeface="Courier"/>
-              </a:rPr>
-              <a:t>))</a:t>
-            </a:r>
-          </a:p>
-          <a:p>
-            <a:pPr lvl="0" indent="0" marL="0">
-              <a:buNone/>
-            </a:pPr>
-            <a:r>
-              <a:rPr/>
-              <a:t>설치, 불러오기, </a:t>
-            </a:r>
-            <a:r>
-              <a:rPr>
-                <a:latin typeface="Courier"/>
-              </a:rPr>
-              <a:t>::</a:t>
-            </a:r>
-            <a:r>
-              <a:rPr/>
-              <a:t> 사용의 차이를 설명합니다.</a:t>
-            </a:r>
-          </a:p>
-        </p:txBody>
-      </p:sp>
-    </p:spTree>
-  </p:cSld>
-</p:sld>
-</file>
-
 <file path=ppt/slides/slide59.xml><?xml version="1.0" encoding="utf-8"?>
 <p:sld xmlns:a="http://schemas.openxmlformats.org/drawingml/2006/main" xmlns:r="http://schemas.openxmlformats.org/officeDocument/2006/relationships" xmlns:p="http://schemas.openxmlformats.org/presentationml/2006/main">
   <p:cSld>
@@ -15796,18 +16412,18 @@
       </p:grpSpPr>
       <p:sp>
         <p:nvSpPr>
-          <p:cNvPr id="2" name="제목 1">
-            <a:extLst>
-              <a:ext uri="{FF2B5EF4-FFF2-40B4-BE49-F238E27FC236}">
-                <a16:creationId xmlns:a16="http://schemas.microsoft.com/office/drawing/2014/main" id="{78B73D98-9A61-479D-A627-D816C25A9F4B}"/>
-              </a:ext>
-            </a:extLst>
-          </p:cNvPr>
-          <p:cNvSpPr>
-            <a:spLocks noGrp="1"/>
-          </p:cNvSpPr>
-          <p:nvPr>
-            <p:ph type="title"/>
+          <p:cNvPr id="3" name="내용 개체 틀 2">
+            <a:extLst>
+              <a:ext uri="{FF2B5EF4-FFF2-40B4-BE49-F238E27FC236}">
+                <a16:creationId xmlns:a16="http://schemas.microsoft.com/office/drawing/2014/main" id="{464D836E-C469-4584-900E-0F0FF86B99E2}"/>
+              </a:ext>
+            </a:extLst>
+          </p:cNvPr>
+          <p:cNvSpPr>
+            <a:spLocks noGrp="1"/>
+          </p:cNvSpPr>
+          <p:nvPr>
+            <p:ph idx="1"/>
           </p:nvPr>
         </p:nvSpPr>
         <p:spPr/>
@@ -15820,294 +16436,7 @@
             </a:pPr>
             <a:r>
               <a:rPr/>
-              <a:t>실습 2: 이름이 있는 리스트 만들기</a:t>
-            </a:r>
-          </a:p>
-        </p:txBody>
-      </p:sp>
-      <p:sp>
-        <p:nvSpPr>
-          <p:cNvPr id="3" name="내용 개체 틀 2">
-            <a:extLst>
-              <a:ext uri="{FF2B5EF4-FFF2-40B4-BE49-F238E27FC236}">
-                <a16:creationId xmlns:a16="http://schemas.microsoft.com/office/drawing/2014/main" id="{464D836E-C469-4584-900E-0F0FF86B99E2}"/>
-              </a:ext>
-            </a:extLst>
-          </p:cNvPr>
-          <p:cNvSpPr>
-            <a:spLocks noGrp="1"/>
-          </p:cNvSpPr>
-          <p:nvPr>
-            <p:ph idx="1"/>
-          </p:nvPr>
-        </p:nvSpPr>
-        <p:spPr/>
-        <p:txBody>
-          <a:bodyPr/>
-          <a:lstStyle/>
-          <a:p>
-            <a:pPr lvl="0" indent="0">
-              <a:buNone/>
-            </a:pPr>
-            <a:r>
-              <a:rPr>
-                <a:solidFill>
-                  <a:srgbClr val="003B4F"/>
-                </a:solidFill>
-                <a:latin typeface="Courier"/>
-              </a:rPr>
-              <a:t>sample_result &lt;- </a:t>
-            </a:r>
-            <a:r>
-              <a:rPr>
-                <a:solidFill>
-                  <a:srgbClr val="4758AB"/>
-                </a:solidFill>
-                <a:latin typeface="Courier"/>
-              </a:rPr>
-              <a:t>list</a:t>
-            </a:r>
-            <a:r>
-              <a:rPr>
-                <a:solidFill>
-                  <a:srgbClr val="003B4F"/>
-                </a:solidFill>
-                <a:latin typeface="Courier"/>
-              </a:rPr>
-              <a:t>(</a:t>
-            </a:r>
-            <a:br/>
-            <a:r>
-              <a:rPr>
-                <a:solidFill>
-                  <a:srgbClr val="003B4F"/>
-                </a:solidFill>
-                <a:latin typeface="Courier"/>
-              </a:rPr>
-              <a:t>  </a:t>
-            </a:r>
-            <a:r>
-              <a:rPr>
-                <a:solidFill>
-                  <a:srgbClr val="657422"/>
-                </a:solidFill>
-                <a:latin typeface="Courier"/>
-              </a:rPr>
-              <a:t>sample_id =</a:t>
-            </a:r>
-            <a:r>
-              <a:rPr>
-                <a:solidFill>
-                  <a:srgbClr val="003B4F"/>
-                </a:solidFill>
-                <a:latin typeface="Courier"/>
-              </a:rPr>
-              <a:t> </a:t>
-            </a:r>
-            <a:r>
-              <a:rPr>
-                <a:solidFill>
-                  <a:srgbClr val="20794D"/>
-                </a:solidFill>
-                <a:latin typeface="Courier"/>
-              </a:rPr>
-              <a:t>"control_1"</a:t>
-            </a:r>
-            <a:r>
-              <a:rPr>
-                <a:solidFill>
-                  <a:srgbClr val="003B4F"/>
-                </a:solidFill>
-                <a:latin typeface="Courier"/>
-              </a:rPr>
-              <a:t>,</a:t>
-            </a:r>
-            <a:br/>
-            <a:r>
-              <a:rPr>
-                <a:solidFill>
-                  <a:srgbClr val="003B4F"/>
-                </a:solidFill>
-                <a:latin typeface="Courier"/>
-              </a:rPr>
-              <a:t>  </a:t>
-            </a:r>
-            <a:r>
-              <a:rPr>
-                <a:solidFill>
-                  <a:srgbClr val="657422"/>
-                </a:solidFill>
-                <a:latin typeface="Courier"/>
-              </a:rPr>
-              <a:t>cell_count =</a:t>
-            </a:r>
-            <a:r>
-              <a:rPr>
-                <a:solidFill>
-                  <a:srgbClr val="003B4F"/>
-                </a:solidFill>
-                <a:latin typeface="Courier"/>
-              </a:rPr>
-              <a:t> </a:t>
-            </a:r>
-            <a:r>
-              <a:rPr>
-                <a:solidFill>
-                  <a:srgbClr val="AD0000"/>
-                </a:solidFill>
-                <a:latin typeface="Courier"/>
-              </a:rPr>
-              <a:t>1240</a:t>
-            </a:r>
-            <a:r>
-              <a:rPr>
-                <a:solidFill>
-                  <a:srgbClr val="003B4F"/>
-                </a:solidFill>
-                <a:latin typeface="Courier"/>
-              </a:rPr>
-              <a:t>,</a:t>
-            </a:r>
-            <a:br/>
-            <a:r>
-              <a:rPr>
-                <a:solidFill>
-                  <a:srgbClr val="003B4F"/>
-                </a:solidFill>
-                <a:latin typeface="Courier"/>
-              </a:rPr>
-              <a:t>  </a:t>
-            </a:r>
-            <a:r>
-              <a:rPr>
-                <a:solidFill>
-                  <a:srgbClr val="657422"/>
-                </a:solidFill>
-                <a:latin typeface="Courier"/>
-              </a:rPr>
-              <a:t>passed_qc =</a:t>
-            </a:r>
-            <a:r>
-              <a:rPr>
-                <a:solidFill>
-                  <a:srgbClr val="003B4F"/>
-                </a:solidFill>
-                <a:latin typeface="Courier"/>
-              </a:rPr>
-              <a:t> </a:t>
-            </a:r>
-            <a:r>
-              <a:rPr>
-                <a:solidFill>
-                  <a:srgbClr val="8F5902"/>
-                </a:solidFill>
-                <a:latin typeface="Courier"/>
-              </a:rPr>
-              <a:t>TRUE</a:t>
-            </a:r>
-            <a:br/>
-            <a:r>
-              <a:rPr>
-                <a:solidFill>
-                  <a:srgbClr val="003B4F"/>
-                </a:solidFill>
-                <a:latin typeface="Courier"/>
-              </a:rPr>
-              <a:t>)</a:t>
-            </a:r>
-            <a:br/>
-            <a:br/>
-            <a:r>
-              <a:rPr>
-                <a:solidFill>
-                  <a:srgbClr val="003B4F"/>
-                </a:solidFill>
-                <a:latin typeface="Courier"/>
-              </a:rPr>
-              <a:t>sample_result</a:t>
-            </a:r>
-            <a:r>
-              <a:rPr>
-                <a:solidFill>
-                  <a:srgbClr val="5E5E5E"/>
-                </a:solidFill>
-                <a:latin typeface="Courier"/>
-              </a:rPr>
-              <a:t>$</a:t>
-            </a:r>
-            <a:r>
-              <a:rPr>
-                <a:solidFill>
-                  <a:srgbClr val="003B4F"/>
-                </a:solidFill>
-                <a:latin typeface="Courier"/>
-              </a:rPr>
-              <a:t>cell_count</a:t>
-            </a:r>
-            <a:br/>
-            <a:r>
-              <a:rPr>
-                <a:solidFill>
-                  <a:srgbClr val="003B4F"/>
-                </a:solidFill>
-                <a:latin typeface="Courier"/>
-              </a:rPr>
-              <a:t>sample_result[[</a:t>
-            </a:r>
-            <a:r>
-              <a:rPr>
-                <a:solidFill>
-                  <a:srgbClr val="20794D"/>
-                </a:solidFill>
-                <a:latin typeface="Courier"/>
-              </a:rPr>
-              <a:t>"cell_count"</a:t>
-            </a:r>
-            <a:r>
-              <a:rPr>
-                <a:solidFill>
-                  <a:srgbClr val="003B4F"/>
-                </a:solidFill>
-                <a:latin typeface="Courier"/>
-              </a:rPr>
-              <a:t>]]</a:t>
-            </a:r>
-            <a:br/>
-            <a:r>
-              <a:rPr>
-                <a:solidFill>
-                  <a:srgbClr val="003B4F"/>
-                </a:solidFill>
-                <a:latin typeface="Courier"/>
-              </a:rPr>
-              <a:t>sample_result[</a:t>
-            </a:r>
-            <a:r>
-              <a:rPr>
-                <a:solidFill>
-                  <a:srgbClr val="20794D"/>
-                </a:solidFill>
-                <a:latin typeface="Courier"/>
-              </a:rPr>
-              <a:t>"cell_count"</a:t>
-            </a:r>
-            <a:r>
-              <a:rPr>
-                <a:solidFill>
-                  <a:srgbClr val="003B4F"/>
-                </a:solidFill>
-                <a:latin typeface="Courier"/>
-              </a:rPr>
-              <a:t>]</a:t>
-            </a:r>
-          </a:p>
-          <a:p>
-            <a:pPr lvl="0" indent="0" marL="0">
-              <a:buNone/>
-            </a:pPr>
-            <a:r>
-              <a:rPr/>
-              <a:t>세 선택 결과의 자료형을 비교합니다.</a:t>
+              <a:t>공유 목적과 다시 사용할 방법을 고려해 저장 형식을 선택합니다.</a:t>
             </a:r>
           </a:p>
         </p:txBody>
@@ -16285,7 +16614,7 @@
             </a:pPr>
             <a:r>
               <a:rPr/>
-              <a:t>실습 3: 중첩된 분석 객체 탐색하기</a:t>
+              <a:t>흔한 오류 1: 설치와 불러오기를 혼동한다</a:t>
             </a:r>
           </a:p>
         </p:txBody>
@@ -16317,86 +16646,24 @@
             <a:r>
               <a:rPr>
                 <a:solidFill>
-                  <a:srgbClr val="4758AB"/>
-                </a:solidFill>
-                <a:latin typeface="Courier"/>
-              </a:rPr>
-              <a:t>names</a:t>
-            </a:r>
-            <a:r>
-              <a:rPr>
-                <a:solidFill>
-                  <a:srgbClr val="003B4F"/>
-                </a:solidFill>
-                <a:latin typeface="Courier"/>
-              </a:rPr>
-              <a:t>(analysis_result)</a:t>
+                  <a:srgbClr val="5E5E5E"/>
+                </a:solidFill>
+                <a:latin typeface="Courier"/>
+              </a:rPr>
+              <a:t># 한 번 설치</a:t>
             </a:r>
             <a:br/>
             <a:r>
               <a:rPr>
                 <a:solidFill>
-                  <a:srgbClr val="4758AB"/>
-                </a:solidFill>
-                <a:latin typeface="Courier"/>
-              </a:rPr>
-              <a:t>str</a:t>
-            </a:r>
-            <a:r>
-              <a:rPr>
-                <a:solidFill>
-                  <a:srgbClr val="003B4F"/>
-                </a:solidFill>
-                <a:latin typeface="Courier"/>
-              </a:rPr>
-              <a:t>(analysis_result, </a:t>
-            </a:r>
-            <a:r>
-              <a:rPr>
-                <a:solidFill>
-                  <a:srgbClr val="657422"/>
-                </a:solidFill>
-                <a:latin typeface="Courier"/>
-              </a:rPr>
-              <a:t>max.level =</a:t>
-            </a:r>
-            <a:r>
-              <a:rPr>
-                <a:solidFill>
-                  <a:srgbClr val="003B4F"/>
-                </a:solidFill>
-                <a:latin typeface="Courier"/>
-              </a:rPr>
-              <a:t> </a:t>
-            </a:r>
-            <a:r>
-              <a:rPr>
-                <a:solidFill>
-                  <a:srgbClr val="AD0000"/>
-                </a:solidFill>
-                <a:latin typeface="Courier"/>
-              </a:rPr>
-              <a:t>2</a:t>
-            </a:r>
-            <a:r>
-              <a:rPr>
-                <a:solidFill>
-                  <a:srgbClr val="003B4F"/>
-                </a:solidFill>
-                <a:latin typeface="Courier"/>
-              </a:rPr>
-              <a:t>)</a:t>
+                  <a:srgbClr val="5E5E5E"/>
+                </a:solidFill>
+                <a:latin typeface="Courier"/>
+              </a:rPr>
+              <a:t># install.packages("package_name")</a:t>
             </a:r>
             <a:br/>
-            <a:r>
-              <a:rPr>
-                <a:solidFill>
-                  <a:srgbClr val="003B4F"/>
-                </a:solidFill>
-                <a:latin typeface="Courier"/>
-              </a:rPr>
-              <a:t>analysis_result</a:t>
-            </a:r>
+            <a:br/>
             <a:r>
               <a:rPr>
                 <a:solidFill>
@@ -16404,17 +16671,9 @@
                 </a:solidFill>
                 <a:latin typeface="Courier"/>
               </a:rPr>
-              <a:t>$</a:t>
-            </a:r>
-            <a:r>
-              <a:rPr>
-                <a:solidFill>
-                  <a:srgbClr val="003B4F"/>
-                </a:solidFill>
-                <a:latin typeface="Courier"/>
-              </a:rPr>
-              <a:t>parameters</a:t>
-            </a:r>
+              <a:t># 새 R 세션에서 불러오기</a:t>
+            </a:r>
+            <a:br/>
             <a:r>
               <a:rPr>
                 <a:solidFill>
@@ -16422,34 +16681,7 @@
                 </a:solidFill>
                 <a:latin typeface="Courier"/>
               </a:rPr>
-              <a:t>$</a:t>
-            </a:r>
-            <a:r>
-              <a:rPr>
-                <a:solidFill>
-                  <a:srgbClr val="003B4F"/>
-                </a:solidFill>
-                <a:latin typeface="Courier"/>
-              </a:rPr>
-              <a:t>qc</a:t>
-            </a:r>
-            <a:r>
-              <a:rPr>
-                <a:solidFill>
-                  <a:srgbClr val="5E5E5E"/>
-                </a:solidFill>
-                <a:latin typeface="Courier"/>
-              </a:rPr>
-              <a:t>$</a:t>
-            </a:r>
-            <a:r>
-              <a:rPr>
-                <a:solidFill>
-                  <a:srgbClr val="003B4F"/>
-                </a:solidFill>
-                <a:latin typeface="Courier"/>
-              </a:rPr>
-              <a:t>min_cells</a:t>
+              <a:t># library(package_name)</a:t>
             </a:r>
           </a:p>
           <a:p>
@@ -16458,7 +16690,7 @@
             </a:pPr>
             <a:r>
               <a:rPr/>
-              <a:t>바깥 단계부터 이름과 구조를 확인해 필요한 값에 접근합니다.</a:t>
+              <a:t>설치 명령을 분석 스크립트가 실행될 때마다 반복하지 않습니다.</a:t>
             </a:r>
           </a:p>
         </p:txBody>
@@ -16511,7 +16743,27 @@
             </a:pPr>
             <a:r>
               <a:rPr/>
-              <a:t>실습 4: RDS로 저장하고 복원하기</a:t>
+              <a:t>흔한 오류 2: </a:t>
+            </a:r>
+            <a:r>
+              <a:rPr>
+                <a:latin typeface="Courier"/>
+              </a:rPr>
+              <a:t>[ ]</a:t>
+            </a:r>
+            <a:r>
+              <a:rPr/>
+              <a:t>와 </a:t>
+            </a:r>
+            <a:r>
+              <a:rPr>
+                <a:latin typeface="Courier"/>
+              </a:rPr>
+              <a:t>[[ ]]</a:t>
+            </a:r>
+            <a:r>
+              <a:rPr/>
+              <a:t>를 혼동한다</a:t>
             </a:r>
           </a:p>
         </p:txBody>
@@ -16547,16 +16799,16 @@
                 </a:solidFill>
                 <a:latin typeface="Courier"/>
               </a:rPr>
-              <a:t>saveRDS</a:t>
-            </a:r>
-            <a:r>
-              <a:rPr>
-                <a:solidFill>
-                  <a:srgbClr val="003B4F"/>
-                </a:solidFill>
-                <a:latin typeface="Courier"/>
-              </a:rPr>
-              <a:t>(analysis_result, </a:t>
+              <a:t>class</a:t>
+            </a:r>
+            <a:r>
+              <a:rPr>
+                <a:solidFill>
+                  <a:srgbClr val="003B4F"/>
+                </a:solidFill>
+                <a:latin typeface="Courier"/>
+              </a:rPr>
+              <a:t>(sample_result[</a:t>
             </a:r>
             <a:r>
               <a:rPr>
@@ -16565,44 +16817,35 @@
                 </a:solidFill>
                 <a:latin typeface="Courier"/>
               </a:rPr>
-              <a:t>"results/analysis_result.rds"</a:t>
-            </a:r>
-            <a:r>
-              <a:rPr>
-                <a:solidFill>
-                  <a:srgbClr val="003B4F"/>
-                </a:solidFill>
-                <a:latin typeface="Courier"/>
-              </a:rPr>
-              <a:t>)</a:t>
+              <a:t>"cell_count"</a:t>
+            </a:r>
+            <a:r>
+              <a:rPr>
+                <a:solidFill>
+                  <a:srgbClr val="003B4F"/>
+                </a:solidFill>
+                <a:latin typeface="Courier"/>
+              </a:rPr>
+              <a:t>])</a:t>
             </a:r>
             <a:br/>
             <a:r>
               <a:rPr>
                 <a:solidFill>
-                  <a:srgbClr val="003B4F"/>
-                </a:solidFill>
-                <a:latin typeface="Courier"/>
-              </a:rPr>
-              <a:t>restored_result &lt;- </a:t>
-            </a:r>
-            <a:r>
-              <a:rPr>
-                <a:solidFill>
                   <a:srgbClr val="4758AB"/>
                 </a:solidFill>
                 <a:latin typeface="Courier"/>
               </a:rPr>
-              <a:t>readRDS</a:t>
-            </a:r>
-            <a:r>
-              <a:rPr>
-                <a:solidFill>
-                  <a:srgbClr val="003B4F"/>
-                </a:solidFill>
-                <a:latin typeface="Courier"/>
-              </a:rPr>
-              <a:t>(</a:t>
+              <a:t>class</a:t>
+            </a:r>
+            <a:r>
+              <a:rPr>
+                <a:solidFill>
+                  <a:srgbClr val="003B4F"/>
+                </a:solidFill>
+                <a:latin typeface="Courier"/>
+              </a:rPr>
+              <a:t>(sample_result[[</a:t>
             </a:r>
             <a:r>
               <a:rPr>
@@ -16611,36 +16854,16 @@
                 </a:solidFill>
                 <a:latin typeface="Courier"/>
               </a:rPr>
-              <a:t>"results/analysis_result.rds"</a:t>
-            </a:r>
-            <a:r>
-              <a:rPr>
-                <a:solidFill>
-                  <a:srgbClr val="003B4F"/>
-                </a:solidFill>
-                <a:latin typeface="Courier"/>
-              </a:rPr>
-              <a:t>)</a:t>
-            </a:r>
-            <a:br/>
-            <a:br/>
-            <a:r>
-              <a:rPr>
-                <a:solidFill>
-                  <a:srgbClr val="4758AB"/>
-                </a:solidFill>
-                <a:latin typeface="Courier"/>
-              </a:rPr>
-              <a:t>identical</a:t>
-            </a:r>
-            <a:r>
-              <a:rPr>
-                <a:solidFill>
-                  <a:srgbClr val="003B4F"/>
-                </a:solidFill>
-                <a:latin typeface="Courier"/>
-              </a:rPr>
-              <a:t>(analysis_result, restored_result)</a:t>
+              <a:t>"cell_count"</a:t>
+            </a:r>
+            <a:r>
+              <a:rPr>
+                <a:solidFill>
+                  <a:srgbClr val="003B4F"/>
+                </a:solidFill>
+                <a:latin typeface="Courier"/>
+              </a:rPr>
+              <a:t>]])</a:t>
             </a:r>
           </a:p>
           <a:p>
@@ -16649,7 +16872,7 @@
             </a:pPr>
             <a:r>
               <a:rPr/>
-              <a:t>복원한 객체의 클래스, 이름, 구조도 확인합니다.</a:t>
+              <a:t>필요한 결과가 리스트인지 원소 내용인지 확인합니다.</a:t>
             </a:r>
           </a:p>
         </p:txBody>
@@ -16702,7 +16925,7 @@
             </a:pPr>
             <a:r>
               <a:rPr/>
-              <a:t>오늘 배운 내용</a:t>
+              <a:t>흔한 오류 3: 내부 구조를 추측한다</a:t>
             </a:r>
           </a:p>
         </p:txBody>
@@ -16728,104 +16951,109 @@
           <a:bodyPr/>
           <a:lstStyle/>
           <a:p>
-            <a:pPr lvl="0"/>
-            <a:r>
-              <a:rPr/>
-              <a:t>패키지 설치와 현재 세션에 불러오기는 서로 다른 과정입니다.</a:t>
-            </a:r>
-          </a:p>
-          <a:p>
-            <a:pPr lvl="0"/>
-            <a:r>
-              <a:rPr/>
-              <a:t>리스트는 자료형과 크기가 다른 여러 객체를 함께 저장합니다.</a:t>
-            </a:r>
-          </a:p>
-          <a:p>
-            <a:pPr lvl="0"/>
-            <a:r>
-              <a:rPr>
-                <a:latin typeface="Courier"/>
-              </a:rPr>
-              <a:t>[ ]</a:t>
-            </a:r>
-            <a:r>
-              <a:rPr/>
-              <a:t>는 리스트를, </a:t>
-            </a:r>
-            <a:r>
-              <a:rPr>
-                <a:latin typeface="Courier"/>
-              </a:rPr>
-              <a:t>[[ ]]</a:t>
-            </a:r>
-            <a:r>
-              <a:rPr/>
-              <a:t>와 </a:t>
-            </a:r>
-            <a:r>
-              <a:rPr>
-                <a:latin typeface="Courier"/>
-              </a:rPr>
-              <a:t>$</a:t>
-            </a:r>
-            <a:r>
-              <a:rPr/>
-              <a:t>는 원소 내용을 반환합니다.</a:t>
-            </a:r>
-          </a:p>
-          <a:p>
-            <a:pPr lvl="0"/>
-            <a:r>
-              <a:rPr/>
-              <a:t>복잡한 객체는 </a:t>
-            </a:r>
-            <a:r>
-              <a:rPr>
-                <a:latin typeface="Courier"/>
-              </a:rPr>
-              <a:t>class()</a:t>
-            </a:r>
-            <a:r>
-              <a:rPr/>
-              <a:t>, </a:t>
-            </a:r>
-            <a:r>
-              <a:rPr>
-                <a:latin typeface="Courier"/>
-              </a:rPr>
-              <a:t>str()</a:t>
-            </a:r>
-            <a:r>
-              <a:rPr/>
-              <a:t>, </a:t>
-            </a:r>
-            <a:r>
-              <a:rPr>
-                <a:latin typeface="Courier"/>
-              </a:rPr>
-              <a:t>names()</a:t>
-            </a:r>
-            <a:r>
-              <a:rPr/>
-              <a:t>, </a:t>
-            </a:r>
-            <a:r>
-              <a:rPr>
-                <a:latin typeface="Courier"/>
-              </a:rPr>
-              <a:t>attributes()</a:t>
-            </a:r>
-            <a:r>
-              <a:rPr/>
-              <a:t>로 조사합니다.</a:t>
-            </a:r>
-          </a:p>
-          <a:p>
-            <a:pPr lvl="0"/>
-            <a:r>
-              <a:rPr/>
-              <a:t>RDS는 복합 R 객체의 구조를 보존하여 저장합니다.</a:t>
+            <a:pPr lvl="0" indent="0">
+              <a:buNone/>
+            </a:pPr>
+            <a:r>
+              <a:rPr>
+                <a:solidFill>
+                  <a:srgbClr val="4758AB"/>
+                </a:solidFill>
+                <a:latin typeface="Courier"/>
+              </a:rPr>
+              <a:t>class</a:t>
+            </a:r>
+            <a:r>
+              <a:rPr>
+                <a:solidFill>
+                  <a:srgbClr val="003B4F"/>
+                </a:solidFill>
+                <a:latin typeface="Courier"/>
+              </a:rPr>
+              <a:t>(analysis_result)</a:t>
+            </a:r>
+            <a:br/>
+            <a:r>
+              <a:rPr>
+                <a:solidFill>
+                  <a:srgbClr val="4758AB"/>
+                </a:solidFill>
+                <a:latin typeface="Courier"/>
+              </a:rPr>
+              <a:t>names</a:t>
+            </a:r>
+            <a:r>
+              <a:rPr>
+                <a:solidFill>
+                  <a:srgbClr val="003B4F"/>
+                </a:solidFill>
+                <a:latin typeface="Courier"/>
+              </a:rPr>
+              <a:t>(analysis_result)</a:t>
+            </a:r>
+            <a:br/>
+            <a:r>
+              <a:rPr>
+                <a:solidFill>
+                  <a:srgbClr val="4758AB"/>
+                </a:solidFill>
+                <a:latin typeface="Courier"/>
+              </a:rPr>
+              <a:t>str</a:t>
+            </a:r>
+            <a:r>
+              <a:rPr>
+                <a:solidFill>
+                  <a:srgbClr val="003B4F"/>
+                </a:solidFill>
+                <a:latin typeface="Courier"/>
+              </a:rPr>
+              <a:t>(analysis_result, </a:t>
+            </a:r>
+            <a:r>
+              <a:rPr>
+                <a:solidFill>
+                  <a:srgbClr val="657422"/>
+                </a:solidFill>
+                <a:latin typeface="Courier"/>
+              </a:rPr>
+              <a:t>max.level =</a:t>
+            </a:r>
+            <a:r>
+              <a:rPr>
+                <a:solidFill>
+                  <a:srgbClr val="003B4F"/>
+                </a:solidFill>
+                <a:latin typeface="Courier"/>
+              </a:rPr>
+              <a:t> </a:t>
+            </a:r>
+            <a:r>
+              <a:rPr>
+                <a:solidFill>
+                  <a:srgbClr val="AD0000"/>
+                </a:solidFill>
+                <a:latin typeface="Courier"/>
+              </a:rPr>
+              <a:t>2</a:t>
+            </a:r>
+            <a:r>
+              <a:rPr>
+                <a:solidFill>
+                  <a:srgbClr val="003B4F"/>
+                </a:solidFill>
+                <a:latin typeface="Courier"/>
+              </a:rPr>
+              <a:t>)</a:t>
+            </a:r>
+          </a:p>
+          <a:p>
+            <a:pPr lvl="0" indent="0" marL="0">
+              <a:buNone/>
+            </a:pPr>
+            <a:r>
+              <a:rPr/>
+              <a:t>존재하지 않는 이름을 반복해서 시도하기보다 구조와 이름을 먼저 조사합니다.</a:t>
             </a:r>
           </a:p>
         </p:txBody>
@@ -16836,6 +17064,1329 @@
 </file>
 
 <file path=ppt/slides/slide63.xml><?xml version="1.0" encoding="utf-8"?>
+<p:sld xmlns:a="http://schemas.openxmlformats.org/drawingml/2006/main" xmlns:r="http://schemas.openxmlformats.org/officeDocument/2006/relationships" xmlns:p="http://schemas.openxmlformats.org/presentationml/2006/main">
+  <p:cSld>
+    <p:spTree>
+      <p:nvGrpSpPr>
+        <p:cNvPr id="1" name=""/>
+        <p:cNvGrpSpPr/>
+        <p:nvPr/>
+      </p:nvGrpSpPr>
+      <p:grpSpPr>
+        <a:xfrm>
+          <a:off x="0" y="0"/>
+          <a:ext cx="0" cy="0"/>
+          <a:chOff x="0" y="0"/>
+          <a:chExt cx="0" cy="0"/>
+        </a:xfrm>
+      </p:grpSpPr>
+      <p:sp>
+        <p:nvSpPr>
+          <p:cNvPr id="2" name="제목 1">
+            <a:extLst>
+              <a:ext uri="{FF2B5EF4-FFF2-40B4-BE49-F238E27FC236}">
+                <a16:creationId xmlns:a16="http://schemas.microsoft.com/office/drawing/2014/main" id="{78B73D98-9A61-479D-A627-D816C25A9F4B}"/>
+              </a:ext>
+            </a:extLst>
+          </p:cNvPr>
+          <p:cNvSpPr>
+            <a:spLocks noGrp="1"/>
+          </p:cNvSpPr>
+          <p:nvPr>
+            <p:ph type="title"/>
+          </p:nvPr>
+        </p:nvSpPr>
+        <p:spPr/>
+        <p:txBody>
+          <a:bodyPr/>
+          <a:lstStyle/>
+          <a:p>
+            <a:pPr lvl="0" indent="0" marL="0">
+              <a:buNone/>
+            </a:pPr>
+            <a:r>
+              <a:rPr/>
+              <a:t>실습 1: 패키지 상태 확인하기</a:t>
+            </a:r>
+          </a:p>
+        </p:txBody>
+      </p:sp>
+      <p:sp>
+        <p:nvSpPr>
+          <p:cNvPr id="3" name="내용 개체 틀 2">
+            <a:extLst>
+              <a:ext uri="{FF2B5EF4-FFF2-40B4-BE49-F238E27FC236}">
+                <a16:creationId xmlns:a16="http://schemas.microsoft.com/office/drawing/2014/main" id="{464D836E-C469-4584-900E-0F0FF86B99E2}"/>
+              </a:ext>
+            </a:extLst>
+          </p:cNvPr>
+          <p:cNvSpPr>
+            <a:spLocks noGrp="1"/>
+          </p:cNvSpPr>
+          <p:nvPr>
+            <p:ph idx="1"/>
+          </p:nvPr>
+        </p:nvSpPr>
+        <p:spPr/>
+        <p:txBody>
+          <a:bodyPr/>
+          <a:lstStyle/>
+          <a:p>
+            <a:pPr lvl="0" indent="0">
+              <a:buNone/>
+            </a:pPr>
+            <a:r>
+              <a:rPr>
+                <a:solidFill>
+                  <a:srgbClr val="20794D"/>
+                </a:solidFill>
+                <a:latin typeface="Courier"/>
+              </a:rPr>
+              <a:t>"stats"</a:t>
+            </a:r>
+            <a:r>
+              <a:rPr>
+                <a:solidFill>
+                  <a:srgbClr val="003B4F"/>
+                </a:solidFill>
+                <a:latin typeface="Courier"/>
+              </a:rPr>
+              <a:t> </a:t>
+            </a:r>
+            <a:r>
+              <a:rPr>
+                <a:solidFill>
+                  <a:srgbClr val="5E5E5E"/>
+                </a:solidFill>
+                <a:latin typeface="Courier"/>
+              </a:rPr>
+              <a:t>%in%</a:t>
+            </a:r>
+            <a:r>
+              <a:rPr>
+                <a:solidFill>
+                  <a:srgbClr val="003B4F"/>
+                </a:solidFill>
+                <a:latin typeface="Courier"/>
+              </a:rPr>
+              <a:t> </a:t>
+            </a:r>
+            <a:r>
+              <a:rPr>
+                <a:solidFill>
+                  <a:srgbClr val="4758AB"/>
+                </a:solidFill>
+                <a:latin typeface="Courier"/>
+              </a:rPr>
+              <a:t>rownames</a:t>
+            </a:r>
+            <a:r>
+              <a:rPr>
+                <a:solidFill>
+                  <a:srgbClr val="003B4F"/>
+                </a:solidFill>
+                <a:latin typeface="Courier"/>
+              </a:rPr>
+              <a:t>(</a:t>
+            </a:r>
+            <a:r>
+              <a:rPr>
+                <a:solidFill>
+                  <a:srgbClr val="4758AB"/>
+                </a:solidFill>
+                <a:latin typeface="Courier"/>
+              </a:rPr>
+              <a:t>installed.packages</a:t>
+            </a:r>
+            <a:r>
+              <a:rPr>
+                <a:solidFill>
+                  <a:srgbClr val="003B4F"/>
+                </a:solidFill>
+                <a:latin typeface="Courier"/>
+              </a:rPr>
+              <a:t>())</a:t>
+            </a:r>
+            <a:br/>
+            <a:r>
+              <a:rPr>
+                <a:solidFill>
+                  <a:srgbClr val="4758AB"/>
+                </a:solidFill>
+                <a:latin typeface="Courier"/>
+              </a:rPr>
+              <a:t>requireNamespace</a:t>
+            </a:r>
+            <a:r>
+              <a:rPr>
+                <a:solidFill>
+                  <a:srgbClr val="003B4F"/>
+                </a:solidFill>
+                <a:latin typeface="Courier"/>
+              </a:rPr>
+              <a:t>(</a:t>
+            </a:r>
+            <a:r>
+              <a:rPr>
+                <a:solidFill>
+                  <a:srgbClr val="20794D"/>
+                </a:solidFill>
+                <a:latin typeface="Courier"/>
+              </a:rPr>
+              <a:t>"stats"</a:t>
+            </a:r>
+            <a:r>
+              <a:rPr>
+                <a:solidFill>
+                  <a:srgbClr val="003B4F"/>
+                </a:solidFill>
+                <a:latin typeface="Courier"/>
+              </a:rPr>
+              <a:t>, </a:t>
+            </a:r>
+            <a:r>
+              <a:rPr>
+                <a:solidFill>
+                  <a:srgbClr val="657422"/>
+                </a:solidFill>
+                <a:latin typeface="Courier"/>
+              </a:rPr>
+              <a:t>quietly =</a:t>
+            </a:r>
+            <a:r>
+              <a:rPr>
+                <a:solidFill>
+                  <a:srgbClr val="003B4F"/>
+                </a:solidFill>
+                <a:latin typeface="Courier"/>
+              </a:rPr>
+              <a:t> </a:t>
+            </a:r>
+            <a:r>
+              <a:rPr>
+                <a:solidFill>
+                  <a:srgbClr val="8F5902"/>
+                </a:solidFill>
+                <a:latin typeface="Courier"/>
+              </a:rPr>
+              <a:t>TRUE</a:t>
+            </a:r>
+            <a:r>
+              <a:rPr>
+                <a:solidFill>
+                  <a:srgbClr val="003B4F"/>
+                </a:solidFill>
+                <a:latin typeface="Courier"/>
+              </a:rPr>
+              <a:t>)</a:t>
+            </a:r>
+            <a:br/>
+            <a:r>
+              <a:rPr>
+                <a:solidFill>
+                  <a:srgbClr val="4758AB"/>
+                </a:solidFill>
+                <a:latin typeface="Courier"/>
+              </a:rPr>
+              <a:t>packageVersion</a:t>
+            </a:r>
+            <a:r>
+              <a:rPr>
+                <a:solidFill>
+                  <a:srgbClr val="003B4F"/>
+                </a:solidFill>
+                <a:latin typeface="Courier"/>
+              </a:rPr>
+              <a:t>(</a:t>
+            </a:r>
+            <a:r>
+              <a:rPr>
+                <a:solidFill>
+                  <a:srgbClr val="20794D"/>
+                </a:solidFill>
+                <a:latin typeface="Courier"/>
+              </a:rPr>
+              <a:t>"stats"</a:t>
+            </a:r>
+            <a:r>
+              <a:rPr>
+                <a:solidFill>
+                  <a:srgbClr val="003B4F"/>
+                </a:solidFill>
+                <a:latin typeface="Courier"/>
+              </a:rPr>
+              <a:t>)</a:t>
+            </a:r>
+            <a:br/>
+            <a:r>
+              <a:rPr>
+                <a:solidFill>
+                  <a:srgbClr val="003B4F"/>
+                </a:solidFill>
+                <a:latin typeface="Courier"/>
+              </a:rPr>
+              <a:t>stats</a:t>
+            </a:r>
+            <a:r>
+              <a:rPr>
+                <a:solidFill>
+                  <a:srgbClr val="5E5E5E"/>
+                </a:solidFill>
+                <a:latin typeface="Courier"/>
+              </a:rPr>
+              <a:t>::</a:t>
+            </a:r>
+            <a:r>
+              <a:rPr>
+                <a:solidFill>
+                  <a:srgbClr val="4758AB"/>
+                </a:solidFill>
+                <a:latin typeface="Courier"/>
+              </a:rPr>
+              <a:t>median</a:t>
+            </a:r>
+            <a:r>
+              <a:rPr>
+                <a:solidFill>
+                  <a:srgbClr val="003B4F"/>
+                </a:solidFill>
+                <a:latin typeface="Courier"/>
+              </a:rPr>
+              <a:t>(</a:t>
+            </a:r>
+            <a:r>
+              <a:rPr>
+                <a:solidFill>
+                  <a:srgbClr val="4758AB"/>
+                </a:solidFill>
+                <a:latin typeface="Courier"/>
+              </a:rPr>
+              <a:t>c</a:t>
+            </a:r>
+            <a:r>
+              <a:rPr>
+                <a:solidFill>
+                  <a:srgbClr val="003B4F"/>
+                </a:solidFill>
+                <a:latin typeface="Courier"/>
+              </a:rPr>
+              <a:t>(</a:t>
+            </a:r>
+            <a:r>
+              <a:rPr>
+                <a:solidFill>
+                  <a:srgbClr val="AD0000"/>
+                </a:solidFill>
+                <a:latin typeface="Courier"/>
+              </a:rPr>
+              <a:t>1200</a:t>
+            </a:r>
+            <a:r>
+              <a:rPr>
+                <a:solidFill>
+                  <a:srgbClr val="003B4F"/>
+                </a:solidFill>
+                <a:latin typeface="Courier"/>
+              </a:rPr>
+              <a:t>, </a:t>
+            </a:r>
+            <a:r>
+              <a:rPr>
+                <a:solidFill>
+                  <a:srgbClr val="AD0000"/>
+                </a:solidFill>
+                <a:latin typeface="Courier"/>
+              </a:rPr>
+              <a:t>1350</a:t>
+            </a:r>
+            <a:r>
+              <a:rPr>
+                <a:solidFill>
+                  <a:srgbClr val="003B4F"/>
+                </a:solidFill>
+                <a:latin typeface="Courier"/>
+              </a:rPr>
+              <a:t>, </a:t>
+            </a:r>
+            <a:r>
+              <a:rPr>
+                <a:solidFill>
+                  <a:srgbClr val="AD0000"/>
+                </a:solidFill>
+                <a:latin typeface="Courier"/>
+              </a:rPr>
+              <a:t>980</a:t>
+            </a:r>
+            <a:r>
+              <a:rPr>
+                <a:solidFill>
+                  <a:srgbClr val="003B4F"/>
+                </a:solidFill>
+                <a:latin typeface="Courier"/>
+              </a:rPr>
+              <a:t>))</a:t>
+            </a:r>
+          </a:p>
+          <a:p>
+            <a:pPr lvl="0" indent="0" marL="0">
+              <a:buNone/>
+            </a:pPr>
+            <a:r>
+              <a:rPr/>
+              <a:t>설치, 불러오기, </a:t>
+            </a:r>
+            <a:r>
+              <a:rPr>
+                <a:latin typeface="Courier"/>
+              </a:rPr>
+              <a:t>::</a:t>
+            </a:r>
+            <a:r>
+              <a:rPr/>
+              <a:t> 사용의 차이를 설명합니다.</a:t>
+            </a:r>
+          </a:p>
+        </p:txBody>
+      </p:sp>
+    </p:spTree>
+  </p:cSld>
+</p:sld>
+</file>
+
+<file path=ppt/slides/slide64.xml><?xml version="1.0" encoding="utf-8"?>
+<p:sld xmlns:a="http://schemas.openxmlformats.org/drawingml/2006/main" xmlns:r="http://schemas.openxmlformats.org/officeDocument/2006/relationships" xmlns:p="http://schemas.openxmlformats.org/presentationml/2006/main">
+  <p:cSld>
+    <p:spTree>
+      <p:nvGrpSpPr>
+        <p:cNvPr id="1" name=""/>
+        <p:cNvGrpSpPr/>
+        <p:nvPr/>
+      </p:nvGrpSpPr>
+      <p:grpSpPr>
+        <a:xfrm>
+          <a:off x="0" y="0"/>
+          <a:ext cx="0" cy="0"/>
+          <a:chOff x="0" y="0"/>
+          <a:chExt cx="0" cy="0"/>
+        </a:xfrm>
+      </p:grpSpPr>
+      <p:sp>
+        <p:nvSpPr>
+          <p:cNvPr id="2" name="제목 1">
+            <a:extLst>
+              <a:ext uri="{FF2B5EF4-FFF2-40B4-BE49-F238E27FC236}">
+                <a16:creationId xmlns:a16="http://schemas.microsoft.com/office/drawing/2014/main" id="{78B73D98-9A61-479D-A627-D816C25A9F4B}"/>
+              </a:ext>
+            </a:extLst>
+          </p:cNvPr>
+          <p:cNvSpPr>
+            <a:spLocks noGrp="1"/>
+          </p:cNvSpPr>
+          <p:nvPr>
+            <p:ph type="title"/>
+          </p:nvPr>
+        </p:nvSpPr>
+        <p:spPr/>
+        <p:txBody>
+          <a:bodyPr/>
+          <a:lstStyle/>
+          <a:p>
+            <a:pPr lvl="0" indent="0" marL="0">
+              <a:buNone/>
+            </a:pPr>
+            <a:r>
+              <a:rPr/>
+              <a:t>실습 2: 이름이 있는 리스트 만들기</a:t>
+            </a:r>
+          </a:p>
+        </p:txBody>
+      </p:sp>
+      <p:sp>
+        <p:nvSpPr>
+          <p:cNvPr id="3" name="내용 개체 틀 2">
+            <a:extLst>
+              <a:ext uri="{FF2B5EF4-FFF2-40B4-BE49-F238E27FC236}">
+                <a16:creationId xmlns:a16="http://schemas.microsoft.com/office/drawing/2014/main" id="{464D836E-C469-4584-900E-0F0FF86B99E2}"/>
+              </a:ext>
+            </a:extLst>
+          </p:cNvPr>
+          <p:cNvSpPr>
+            <a:spLocks noGrp="1"/>
+          </p:cNvSpPr>
+          <p:nvPr>
+            <p:ph idx="1"/>
+          </p:nvPr>
+        </p:nvSpPr>
+        <p:spPr/>
+        <p:txBody>
+          <a:bodyPr/>
+          <a:lstStyle/>
+          <a:p>
+            <a:pPr lvl="0" indent="0">
+              <a:buNone/>
+            </a:pPr>
+            <a:r>
+              <a:rPr>
+                <a:solidFill>
+                  <a:srgbClr val="003B4F"/>
+                </a:solidFill>
+                <a:latin typeface="Courier"/>
+              </a:rPr>
+              <a:t>sample_result &lt;- </a:t>
+            </a:r>
+            <a:r>
+              <a:rPr>
+                <a:solidFill>
+                  <a:srgbClr val="4758AB"/>
+                </a:solidFill>
+                <a:latin typeface="Courier"/>
+              </a:rPr>
+              <a:t>list</a:t>
+            </a:r>
+            <a:r>
+              <a:rPr>
+                <a:solidFill>
+                  <a:srgbClr val="003B4F"/>
+                </a:solidFill>
+                <a:latin typeface="Courier"/>
+              </a:rPr>
+              <a:t>(</a:t>
+            </a:r>
+            <a:br/>
+            <a:r>
+              <a:rPr>
+                <a:solidFill>
+                  <a:srgbClr val="003B4F"/>
+                </a:solidFill>
+                <a:latin typeface="Courier"/>
+              </a:rPr>
+              <a:t>  </a:t>
+            </a:r>
+            <a:r>
+              <a:rPr>
+                <a:solidFill>
+                  <a:srgbClr val="657422"/>
+                </a:solidFill>
+                <a:latin typeface="Courier"/>
+              </a:rPr>
+              <a:t>sample_id =</a:t>
+            </a:r>
+            <a:r>
+              <a:rPr>
+                <a:solidFill>
+                  <a:srgbClr val="003B4F"/>
+                </a:solidFill>
+                <a:latin typeface="Courier"/>
+              </a:rPr>
+              <a:t> </a:t>
+            </a:r>
+            <a:r>
+              <a:rPr>
+                <a:solidFill>
+                  <a:srgbClr val="20794D"/>
+                </a:solidFill>
+                <a:latin typeface="Courier"/>
+              </a:rPr>
+              <a:t>"control_1"</a:t>
+            </a:r>
+            <a:r>
+              <a:rPr>
+                <a:solidFill>
+                  <a:srgbClr val="003B4F"/>
+                </a:solidFill>
+                <a:latin typeface="Courier"/>
+              </a:rPr>
+              <a:t>,</a:t>
+            </a:r>
+            <a:br/>
+            <a:r>
+              <a:rPr>
+                <a:solidFill>
+                  <a:srgbClr val="003B4F"/>
+                </a:solidFill>
+                <a:latin typeface="Courier"/>
+              </a:rPr>
+              <a:t>  </a:t>
+            </a:r>
+            <a:r>
+              <a:rPr>
+                <a:solidFill>
+                  <a:srgbClr val="657422"/>
+                </a:solidFill>
+                <a:latin typeface="Courier"/>
+              </a:rPr>
+              <a:t>cell_count =</a:t>
+            </a:r>
+            <a:r>
+              <a:rPr>
+                <a:solidFill>
+                  <a:srgbClr val="003B4F"/>
+                </a:solidFill>
+                <a:latin typeface="Courier"/>
+              </a:rPr>
+              <a:t> </a:t>
+            </a:r>
+            <a:r>
+              <a:rPr>
+                <a:solidFill>
+                  <a:srgbClr val="AD0000"/>
+                </a:solidFill>
+                <a:latin typeface="Courier"/>
+              </a:rPr>
+              <a:t>1240</a:t>
+            </a:r>
+            <a:r>
+              <a:rPr>
+                <a:solidFill>
+                  <a:srgbClr val="003B4F"/>
+                </a:solidFill>
+                <a:latin typeface="Courier"/>
+              </a:rPr>
+              <a:t>,</a:t>
+            </a:r>
+            <a:br/>
+            <a:r>
+              <a:rPr>
+                <a:solidFill>
+                  <a:srgbClr val="003B4F"/>
+                </a:solidFill>
+                <a:latin typeface="Courier"/>
+              </a:rPr>
+              <a:t>  </a:t>
+            </a:r>
+            <a:r>
+              <a:rPr>
+                <a:solidFill>
+                  <a:srgbClr val="657422"/>
+                </a:solidFill>
+                <a:latin typeface="Courier"/>
+              </a:rPr>
+              <a:t>passed_qc =</a:t>
+            </a:r>
+            <a:r>
+              <a:rPr>
+                <a:solidFill>
+                  <a:srgbClr val="003B4F"/>
+                </a:solidFill>
+                <a:latin typeface="Courier"/>
+              </a:rPr>
+              <a:t> </a:t>
+            </a:r>
+            <a:r>
+              <a:rPr>
+                <a:solidFill>
+                  <a:srgbClr val="8F5902"/>
+                </a:solidFill>
+                <a:latin typeface="Courier"/>
+              </a:rPr>
+              <a:t>TRUE</a:t>
+            </a:r>
+            <a:br/>
+            <a:r>
+              <a:rPr>
+                <a:solidFill>
+                  <a:srgbClr val="003B4F"/>
+                </a:solidFill>
+                <a:latin typeface="Courier"/>
+              </a:rPr>
+              <a:t>)</a:t>
+            </a:r>
+            <a:br/>
+            <a:br/>
+            <a:r>
+              <a:rPr>
+                <a:solidFill>
+                  <a:srgbClr val="003B4F"/>
+                </a:solidFill>
+                <a:latin typeface="Courier"/>
+              </a:rPr>
+              <a:t>sample_result</a:t>
+            </a:r>
+            <a:r>
+              <a:rPr>
+                <a:solidFill>
+                  <a:srgbClr val="5E5E5E"/>
+                </a:solidFill>
+                <a:latin typeface="Courier"/>
+              </a:rPr>
+              <a:t>$</a:t>
+            </a:r>
+            <a:r>
+              <a:rPr>
+                <a:solidFill>
+                  <a:srgbClr val="003B4F"/>
+                </a:solidFill>
+                <a:latin typeface="Courier"/>
+              </a:rPr>
+              <a:t>cell_count</a:t>
+            </a:r>
+            <a:br/>
+            <a:r>
+              <a:rPr>
+                <a:solidFill>
+                  <a:srgbClr val="003B4F"/>
+                </a:solidFill>
+                <a:latin typeface="Courier"/>
+              </a:rPr>
+              <a:t>sample_result[[</a:t>
+            </a:r>
+            <a:r>
+              <a:rPr>
+                <a:solidFill>
+                  <a:srgbClr val="20794D"/>
+                </a:solidFill>
+                <a:latin typeface="Courier"/>
+              </a:rPr>
+              <a:t>"cell_count"</a:t>
+            </a:r>
+            <a:r>
+              <a:rPr>
+                <a:solidFill>
+                  <a:srgbClr val="003B4F"/>
+                </a:solidFill>
+                <a:latin typeface="Courier"/>
+              </a:rPr>
+              <a:t>]]</a:t>
+            </a:r>
+            <a:br/>
+            <a:r>
+              <a:rPr>
+                <a:solidFill>
+                  <a:srgbClr val="003B4F"/>
+                </a:solidFill>
+                <a:latin typeface="Courier"/>
+              </a:rPr>
+              <a:t>sample_result[</a:t>
+            </a:r>
+            <a:r>
+              <a:rPr>
+                <a:solidFill>
+                  <a:srgbClr val="20794D"/>
+                </a:solidFill>
+                <a:latin typeface="Courier"/>
+              </a:rPr>
+              <a:t>"cell_count"</a:t>
+            </a:r>
+            <a:r>
+              <a:rPr>
+                <a:solidFill>
+                  <a:srgbClr val="003B4F"/>
+                </a:solidFill>
+                <a:latin typeface="Courier"/>
+              </a:rPr>
+              <a:t>]</a:t>
+            </a:r>
+          </a:p>
+          <a:p>
+            <a:pPr lvl="0" indent="0" marL="0">
+              <a:buNone/>
+            </a:pPr>
+            <a:r>
+              <a:rPr/>
+              <a:t>세 선택 결과의 자료형을 비교합니다.</a:t>
+            </a:r>
+          </a:p>
+        </p:txBody>
+      </p:sp>
+    </p:spTree>
+  </p:cSld>
+</p:sld>
+</file>
+
+<file path=ppt/slides/slide65.xml><?xml version="1.0" encoding="utf-8"?>
+<p:sld xmlns:a="http://schemas.openxmlformats.org/drawingml/2006/main" xmlns:r="http://schemas.openxmlformats.org/officeDocument/2006/relationships" xmlns:p="http://schemas.openxmlformats.org/presentationml/2006/main">
+  <p:cSld>
+    <p:spTree>
+      <p:nvGrpSpPr>
+        <p:cNvPr id="1" name=""/>
+        <p:cNvGrpSpPr/>
+        <p:nvPr/>
+      </p:nvGrpSpPr>
+      <p:grpSpPr>
+        <a:xfrm>
+          <a:off x="0" y="0"/>
+          <a:ext cx="0" cy="0"/>
+          <a:chOff x="0" y="0"/>
+          <a:chExt cx="0" cy="0"/>
+        </a:xfrm>
+      </p:grpSpPr>
+      <p:sp>
+        <p:nvSpPr>
+          <p:cNvPr id="2" name="제목 1">
+            <a:extLst>
+              <a:ext uri="{FF2B5EF4-FFF2-40B4-BE49-F238E27FC236}">
+                <a16:creationId xmlns:a16="http://schemas.microsoft.com/office/drawing/2014/main" id="{78B73D98-9A61-479D-A627-D816C25A9F4B}"/>
+              </a:ext>
+            </a:extLst>
+          </p:cNvPr>
+          <p:cNvSpPr>
+            <a:spLocks noGrp="1"/>
+          </p:cNvSpPr>
+          <p:nvPr>
+            <p:ph type="title"/>
+          </p:nvPr>
+        </p:nvSpPr>
+        <p:spPr/>
+        <p:txBody>
+          <a:bodyPr/>
+          <a:lstStyle/>
+          <a:p>
+            <a:pPr lvl="0" indent="0" marL="0">
+              <a:buNone/>
+            </a:pPr>
+            <a:r>
+              <a:rPr/>
+              <a:t>실습 3: 중첩된 분석 객체 탐색하기</a:t>
+            </a:r>
+          </a:p>
+        </p:txBody>
+      </p:sp>
+      <p:sp>
+        <p:nvSpPr>
+          <p:cNvPr id="3" name="내용 개체 틀 2">
+            <a:extLst>
+              <a:ext uri="{FF2B5EF4-FFF2-40B4-BE49-F238E27FC236}">
+                <a16:creationId xmlns:a16="http://schemas.microsoft.com/office/drawing/2014/main" id="{464D836E-C469-4584-900E-0F0FF86B99E2}"/>
+              </a:ext>
+            </a:extLst>
+          </p:cNvPr>
+          <p:cNvSpPr>
+            <a:spLocks noGrp="1"/>
+          </p:cNvSpPr>
+          <p:nvPr>
+            <p:ph idx="1"/>
+          </p:nvPr>
+        </p:nvSpPr>
+        <p:spPr/>
+        <p:txBody>
+          <a:bodyPr/>
+          <a:lstStyle/>
+          <a:p>
+            <a:pPr lvl="0" indent="0">
+              <a:buNone/>
+            </a:pPr>
+            <a:r>
+              <a:rPr>
+                <a:solidFill>
+                  <a:srgbClr val="4758AB"/>
+                </a:solidFill>
+                <a:latin typeface="Courier"/>
+              </a:rPr>
+              <a:t>names</a:t>
+            </a:r>
+            <a:r>
+              <a:rPr>
+                <a:solidFill>
+                  <a:srgbClr val="003B4F"/>
+                </a:solidFill>
+                <a:latin typeface="Courier"/>
+              </a:rPr>
+              <a:t>(analysis_result)</a:t>
+            </a:r>
+            <a:br/>
+            <a:r>
+              <a:rPr>
+                <a:solidFill>
+                  <a:srgbClr val="4758AB"/>
+                </a:solidFill>
+                <a:latin typeface="Courier"/>
+              </a:rPr>
+              <a:t>str</a:t>
+            </a:r>
+            <a:r>
+              <a:rPr>
+                <a:solidFill>
+                  <a:srgbClr val="003B4F"/>
+                </a:solidFill>
+                <a:latin typeface="Courier"/>
+              </a:rPr>
+              <a:t>(analysis_result, </a:t>
+            </a:r>
+            <a:r>
+              <a:rPr>
+                <a:solidFill>
+                  <a:srgbClr val="657422"/>
+                </a:solidFill>
+                <a:latin typeface="Courier"/>
+              </a:rPr>
+              <a:t>max.level =</a:t>
+            </a:r>
+            <a:r>
+              <a:rPr>
+                <a:solidFill>
+                  <a:srgbClr val="003B4F"/>
+                </a:solidFill>
+                <a:latin typeface="Courier"/>
+              </a:rPr>
+              <a:t> </a:t>
+            </a:r>
+            <a:r>
+              <a:rPr>
+                <a:solidFill>
+                  <a:srgbClr val="AD0000"/>
+                </a:solidFill>
+                <a:latin typeface="Courier"/>
+              </a:rPr>
+              <a:t>2</a:t>
+            </a:r>
+            <a:r>
+              <a:rPr>
+                <a:solidFill>
+                  <a:srgbClr val="003B4F"/>
+                </a:solidFill>
+                <a:latin typeface="Courier"/>
+              </a:rPr>
+              <a:t>)</a:t>
+            </a:r>
+            <a:br/>
+            <a:r>
+              <a:rPr>
+                <a:solidFill>
+                  <a:srgbClr val="003B4F"/>
+                </a:solidFill>
+                <a:latin typeface="Courier"/>
+              </a:rPr>
+              <a:t>analysis_result</a:t>
+            </a:r>
+            <a:r>
+              <a:rPr>
+                <a:solidFill>
+                  <a:srgbClr val="5E5E5E"/>
+                </a:solidFill>
+                <a:latin typeface="Courier"/>
+              </a:rPr>
+              <a:t>$</a:t>
+            </a:r>
+            <a:r>
+              <a:rPr>
+                <a:solidFill>
+                  <a:srgbClr val="003B4F"/>
+                </a:solidFill>
+                <a:latin typeface="Courier"/>
+              </a:rPr>
+              <a:t>parameters</a:t>
+            </a:r>
+            <a:r>
+              <a:rPr>
+                <a:solidFill>
+                  <a:srgbClr val="5E5E5E"/>
+                </a:solidFill>
+                <a:latin typeface="Courier"/>
+              </a:rPr>
+              <a:t>$</a:t>
+            </a:r>
+            <a:r>
+              <a:rPr>
+                <a:solidFill>
+                  <a:srgbClr val="003B4F"/>
+                </a:solidFill>
+                <a:latin typeface="Courier"/>
+              </a:rPr>
+              <a:t>qc</a:t>
+            </a:r>
+            <a:r>
+              <a:rPr>
+                <a:solidFill>
+                  <a:srgbClr val="5E5E5E"/>
+                </a:solidFill>
+                <a:latin typeface="Courier"/>
+              </a:rPr>
+              <a:t>$</a:t>
+            </a:r>
+            <a:r>
+              <a:rPr>
+                <a:solidFill>
+                  <a:srgbClr val="003B4F"/>
+                </a:solidFill>
+                <a:latin typeface="Courier"/>
+              </a:rPr>
+              <a:t>min_cells</a:t>
+            </a:r>
+          </a:p>
+          <a:p>
+            <a:pPr lvl="0" indent="0" marL="0">
+              <a:buNone/>
+            </a:pPr>
+            <a:r>
+              <a:rPr/>
+              <a:t>바깥 단계부터 이름과 구조를 확인해 필요한 값에 접근합니다.</a:t>
+            </a:r>
+          </a:p>
+        </p:txBody>
+      </p:sp>
+    </p:spTree>
+  </p:cSld>
+</p:sld>
+</file>
+
+<file path=ppt/slides/slide66.xml><?xml version="1.0" encoding="utf-8"?>
+<p:sld xmlns:a="http://schemas.openxmlformats.org/drawingml/2006/main" xmlns:r="http://schemas.openxmlformats.org/officeDocument/2006/relationships" xmlns:p="http://schemas.openxmlformats.org/presentationml/2006/main">
+  <p:cSld>
+    <p:spTree>
+      <p:nvGrpSpPr>
+        <p:cNvPr id="1" name=""/>
+        <p:cNvGrpSpPr/>
+        <p:nvPr/>
+      </p:nvGrpSpPr>
+      <p:grpSpPr>
+        <a:xfrm>
+          <a:off x="0" y="0"/>
+          <a:ext cx="0" cy="0"/>
+          <a:chOff x="0" y="0"/>
+          <a:chExt cx="0" cy="0"/>
+        </a:xfrm>
+      </p:grpSpPr>
+      <p:sp>
+        <p:nvSpPr>
+          <p:cNvPr id="2" name="제목 1">
+            <a:extLst>
+              <a:ext uri="{FF2B5EF4-FFF2-40B4-BE49-F238E27FC236}">
+                <a16:creationId xmlns:a16="http://schemas.microsoft.com/office/drawing/2014/main" id="{78B73D98-9A61-479D-A627-D816C25A9F4B}"/>
+              </a:ext>
+            </a:extLst>
+          </p:cNvPr>
+          <p:cNvSpPr>
+            <a:spLocks noGrp="1"/>
+          </p:cNvSpPr>
+          <p:nvPr>
+            <p:ph type="title"/>
+          </p:nvPr>
+        </p:nvSpPr>
+        <p:spPr/>
+        <p:txBody>
+          <a:bodyPr/>
+          <a:lstStyle/>
+          <a:p>
+            <a:pPr lvl="0" indent="0" marL="0">
+              <a:buNone/>
+            </a:pPr>
+            <a:r>
+              <a:rPr/>
+              <a:t>실습 4: RDS로 저장하고 복원하기</a:t>
+            </a:r>
+          </a:p>
+        </p:txBody>
+      </p:sp>
+      <p:sp>
+        <p:nvSpPr>
+          <p:cNvPr id="3" name="내용 개체 틀 2">
+            <a:extLst>
+              <a:ext uri="{FF2B5EF4-FFF2-40B4-BE49-F238E27FC236}">
+                <a16:creationId xmlns:a16="http://schemas.microsoft.com/office/drawing/2014/main" id="{464D836E-C469-4584-900E-0F0FF86B99E2}"/>
+              </a:ext>
+            </a:extLst>
+          </p:cNvPr>
+          <p:cNvSpPr>
+            <a:spLocks noGrp="1"/>
+          </p:cNvSpPr>
+          <p:nvPr>
+            <p:ph idx="1"/>
+          </p:nvPr>
+        </p:nvSpPr>
+        <p:spPr/>
+        <p:txBody>
+          <a:bodyPr/>
+          <a:lstStyle/>
+          <a:p>
+            <a:pPr lvl="0" indent="0">
+              <a:buNone/>
+            </a:pPr>
+            <a:r>
+              <a:rPr>
+                <a:solidFill>
+                  <a:srgbClr val="4758AB"/>
+                </a:solidFill>
+                <a:latin typeface="Courier"/>
+              </a:rPr>
+              <a:t>saveRDS</a:t>
+            </a:r>
+            <a:r>
+              <a:rPr>
+                <a:solidFill>
+                  <a:srgbClr val="003B4F"/>
+                </a:solidFill>
+                <a:latin typeface="Courier"/>
+              </a:rPr>
+              <a:t>(analysis_result, </a:t>
+            </a:r>
+            <a:r>
+              <a:rPr>
+                <a:solidFill>
+                  <a:srgbClr val="20794D"/>
+                </a:solidFill>
+                <a:latin typeface="Courier"/>
+              </a:rPr>
+              <a:t>"results/analysis_result.rds"</a:t>
+            </a:r>
+            <a:r>
+              <a:rPr>
+                <a:solidFill>
+                  <a:srgbClr val="003B4F"/>
+                </a:solidFill>
+                <a:latin typeface="Courier"/>
+              </a:rPr>
+              <a:t>)</a:t>
+            </a:r>
+            <a:br/>
+            <a:r>
+              <a:rPr>
+                <a:solidFill>
+                  <a:srgbClr val="003B4F"/>
+                </a:solidFill>
+                <a:latin typeface="Courier"/>
+              </a:rPr>
+              <a:t>restored_result &lt;- </a:t>
+            </a:r>
+            <a:r>
+              <a:rPr>
+                <a:solidFill>
+                  <a:srgbClr val="4758AB"/>
+                </a:solidFill>
+                <a:latin typeface="Courier"/>
+              </a:rPr>
+              <a:t>readRDS</a:t>
+            </a:r>
+            <a:r>
+              <a:rPr>
+                <a:solidFill>
+                  <a:srgbClr val="003B4F"/>
+                </a:solidFill>
+                <a:latin typeface="Courier"/>
+              </a:rPr>
+              <a:t>(</a:t>
+            </a:r>
+            <a:r>
+              <a:rPr>
+                <a:solidFill>
+                  <a:srgbClr val="20794D"/>
+                </a:solidFill>
+                <a:latin typeface="Courier"/>
+              </a:rPr>
+              <a:t>"results/analysis_result.rds"</a:t>
+            </a:r>
+            <a:r>
+              <a:rPr>
+                <a:solidFill>
+                  <a:srgbClr val="003B4F"/>
+                </a:solidFill>
+                <a:latin typeface="Courier"/>
+              </a:rPr>
+              <a:t>)</a:t>
+            </a:r>
+            <a:br/>
+            <a:br/>
+            <a:r>
+              <a:rPr>
+                <a:solidFill>
+                  <a:srgbClr val="4758AB"/>
+                </a:solidFill>
+                <a:latin typeface="Courier"/>
+              </a:rPr>
+              <a:t>identical</a:t>
+            </a:r>
+            <a:r>
+              <a:rPr>
+                <a:solidFill>
+                  <a:srgbClr val="003B4F"/>
+                </a:solidFill>
+                <a:latin typeface="Courier"/>
+              </a:rPr>
+              <a:t>(analysis_result, restored_result)</a:t>
+            </a:r>
+          </a:p>
+          <a:p>
+            <a:pPr lvl="0" indent="0" marL="0">
+              <a:buNone/>
+            </a:pPr>
+            <a:r>
+              <a:rPr/>
+              <a:t>복원한 객체의 클래스, 이름, 구조도 확인합니다.</a:t>
+            </a:r>
+          </a:p>
+        </p:txBody>
+      </p:sp>
+    </p:spTree>
+  </p:cSld>
+</p:sld>
+</file>
+
+<file path=ppt/slides/slide67.xml><?xml version="1.0" encoding="utf-8"?>
+<p:sld xmlns:a="http://schemas.openxmlformats.org/drawingml/2006/main" xmlns:r="http://schemas.openxmlformats.org/officeDocument/2006/relationships" xmlns:p="http://schemas.openxmlformats.org/presentationml/2006/main">
+  <p:cSld>
+    <p:spTree>
+      <p:nvGrpSpPr>
+        <p:cNvPr id="1" name=""/>
+        <p:cNvGrpSpPr/>
+        <p:nvPr/>
+      </p:nvGrpSpPr>
+      <p:grpSpPr>
+        <a:xfrm>
+          <a:off x="0" y="0"/>
+          <a:ext cx="0" cy="0"/>
+          <a:chOff x="0" y="0"/>
+          <a:chExt cx="0" cy="0"/>
+        </a:xfrm>
+      </p:grpSpPr>
+      <p:sp>
+        <p:nvSpPr>
+          <p:cNvPr id="2" name="제목 1">
+            <a:extLst>
+              <a:ext uri="{FF2B5EF4-FFF2-40B4-BE49-F238E27FC236}">
+                <a16:creationId xmlns:a16="http://schemas.microsoft.com/office/drawing/2014/main" id="{78B73D98-9A61-479D-A627-D816C25A9F4B}"/>
+              </a:ext>
+            </a:extLst>
+          </p:cNvPr>
+          <p:cNvSpPr>
+            <a:spLocks noGrp="1"/>
+          </p:cNvSpPr>
+          <p:nvPr>
+            <p:ph type="title"/>
+          </p:nvPr>
+        </p:nvSpPr>
+        <p:spPr/>
+        <p:txBody>
+          <a:bodyPr/>
+          <a:lstStyle/>
+          <a:p>
+            <a:pPr lvl="0" indent="0" marL="0">
+              <a:buNone/>
+            </a:pPr>
+            <a:r>
+              <a:rPr/>
+              <a:t>오늘 배운 내용</a:t>
+            </a:r>
+          </a:p>
+        </p:txBody>
+      </p:sp>
+      <p:sp>
+        <p:nvSpPr>
+          <p:cNvPr id="3" name="내용 개체 틀 2">
+            <a:extLst>
+              <a:ext uri="{FF2B5EF4-FFF2-40B4-BE49-F238E27FC236}">
+                <a16:creationId xmlns:a16="http://schemas.microsoft.com/office/drawing/2014/main" id="{464D836E-C469-4584-900E-0F0FF86B99E2}"/>
+              </a:ext>
+            </a:extLst>
+          </p:cNvPr>
+          <p:cNvSpPr>
+            <a:spLocks noGrp="1"/>
+          </p:cNvSpPr>
+          <p:nvPr>
+            <p:ph idx="1"/>
+          </p:nvPr>
+        </p:nvSpPr>
+        <p:spPr/>
+        <p:txBody>
+          <a:bodyPr/>
+          <a:lstStyle/>
+          <a:p>
+            <a:pPr lvl="0"/>
+            <a:r>
+              <a:rPr/>
+              <a:t>패키지 설치와 현재 세션에 불러오기는 서로 다른 과정입니다.</a:t>
+            </a:r>
+          </a:p>
+          <a:p>
+            <a:pPr lvl="0"/>
+            <a:r>
+              <a:rPr/>
+              <a:t>리스트는 자료형과 크기가 다른 여러 객체를 함께 저장합니다.</a:t>
+            </a:r>
+          </a:p>
+          <a:p>
+            <a:pPr lvl="0"/>
+            <a:r>
+              <a:rPr>
+                <a:latin typeface="Courier"/>
+              </a:rPr>
+              <a:t>[ ]</a:t>
+            </a:r>
+            <a:r>
+              <a:rPr/>
+              <a:t>는 리스트를, </a:t>
+            </a:r>
+            <a:r>
+              <a:rPr>
+                <a:latin typeface="Courier"/>
+              </a:rPr>
+              <a:t>[[ ]]</a:t>
+            </a:r>
+            <a:r>
+              <a:rPr/>
+              <a:t>와 </a:t>
+            </a:r>
+            <a:r>
+              <a:rPr>
+                <a:latin typeface="Courier"/>
+              </a:rPr>
+              <a:t>$</a:t>
+            </a:r>
+            <a:r>
+              <a:rPr/>
+              <a:t>는 원소 내용을 반환합니다.</a:t>
+            </a:r>
+          </a:p>
+          <a:p>
+            <a:pPr lvl="0"/>
+            <a:r>
+              <a:rPr/>
+              <a:t>복잡한 객체는 </a:t>
+            </a:r>
+            <a:r>
+              <a:rPr>
+                <a:latin typeface="Courier"/>
+              </a:rPr>
+              <a:t>class()</a:t>
+            </a:r>
+            <a:r>
+              <a:rPr/>
+              <a:t>, </a:t>
+            </a:r>
+            <a:r>
+              <a:rPr>
+                <a:latin typeface="Courier"/>
+              </a:rPr>
+              <a:t>str()</a:t>
+            </a:r>
+            <a:r>
+              <a:rPr/>
+              <a:t>, </a:t>
+            </a:r>
+            <a:r>
+              <a:rPr>
+                <a:latin typeface="Courier"/>
+              </a:rPr>
+              <a:t>names()</a:t>
+            </a:r>
+            <a:r>
+              <a:rPr/>
+              <a:t>, </a:t>
+            </a:r>
+            <a:r>
+              <a:rPr>
+                <a:latin typeface="Courier"/>
+              </a:rPr>
+              <a:t>attributes()</a:t>
+            </a:r>
+            <a:r>
+              <a:rPr/>
+              <a:t>로 조사합니다.</a:t>
+            </a:r>
+          </a:p>
+          <a:p>
+            <a:pPr lvl="0"/>
+            <a:r>
+              <a:rPr/>
+              <a:t>RDS는 복합 R 객체의 구조를 보존하여 저장합니다.</a:t>
+            </a:r>
+          </a:p>
+        </p:txBody>
+      </p:sp>
+    </p:spTree>
+  </p:cSld>
+</p:sld>
+</file>
+
+<file path=ppt/slides/slide68.xml><?xml version="1.0" encoding="utf-8"?>
 <p:sld xmlns:a="http://schemas.openxmlformats.org/drawingml/2006/main" xmlns:r="http://schemas.openxmlformats.org/officeDocument/2006/relationships" xmlns:p="http://schemas.openxmlformats.org/presentationml/2006/main">
   <p:cSld>
     <p:spTree>
